--- a/zzz-additional-documentation/Rest-Api-Design-Build-Run-Day-2.pptx
+++ b/zzz-additional-documentation/Rest-Api-Design-Build-Run-Day-2.pptx
@@ -5,7 +5,7 @@
     <p:sldMasterId id="2147483696" r:id="rId1"/>
   </p:sldMasterIdLst>
   <p:notesMasterIdLst>
-    <p:notesMasterId r:id="rId41"/>
+    <p:notesMasterId r:id="rId45"/>
   </p:notesMasterIdLst>
   <p:sldIdLst>
     <p:sldId id="256" r:id="rId2"/>
@@ -13,40 +13,44 @@
     <p:sldId id="296" r:id="rId4"/>
     <p:sldId id="297" r:id="rId5"/>
     <p:sldId id="315" r:id="rId6"/>
-    <p:sldId id="317" r:id="rId7"/>
-    <p:sldId id="316" r:id="rId8"/>
-    <p:sldId id="318" r:id="rId9"/>
-    <p:sldId id="319" r:id="rId10"/>
-    <p:sldId id="298" r:id="rId11"/>
-    <p:sldId id="320" r:id="rId12"/>
-    <p:sldId id="299" r:id="rId13"/>
-    <p:sldId id="300" r:id="rId14"/>
-    <p:sldId id="301" r:id="rId15"/>
-    <p:sldId id="302" r:id="rId16"/>
-    <p:sldId id="305" r:id="rId17"/>
-    <p:sldId id="307" r:id="rId18"/>
-    <p:sldId id="308" r:id="rId19"/>
-    <p:sldId id="309" r:id="rId20"/>
-    <p:sldId id="310" r:id="rId21"/>
-    <p:sldId id="311" r:id="rId22"/>
-    <p:sldId id="312" r:id="rId23"/>
-    <p:sldId id="313" r:id="rId24"/>
-    <p:sldId id="321" r:id="rId25"/>
-    <p:sldId id="322" r:id="rId26"/>
-    <p:sldId id="306" r:id="rId27"/>
-    <p:sldId id="314" r:id="rId28"/>
-    <p:sldId id="323" r:id="rId29"/>
-    <p:sldId id="303" r:id="rId30"/>
-    <p:sldId id="324" r:id="rId31"/>
-    <p:sldId id="325" r:id="rId32"/>
-    <p:sldId id="326" r:id="rId33"/>
-    <p:sldId id="327" r:id="rId34"/>
-    <p:sldId id="304" r:id="rId35"/>
-    <p:sldId id="328" r:id="rId36"/>
-    <p:sldId id="295" r:id="rId37"/>
-    <p:sldId id="329" r:id="rId38"/>
-    <p:sldId id="291" r:id="rId39"/>
-    <p:sldId id="292" r:id="rId40"/>
+    <p:sldId id="331" r:id="rId7"/>
+    <p:sldId id="317" r:id="rId8"/>
+    <p:sldId id="316" r:id="rId9"/>
+    <p:sldId id="318" r:id="rId10"/>
+    <p:sldId id="319" r:id="rId11"/>
+    <p:sldId id="298" r:id="rId12"/>
+    <p:sldId id="320" r:id="rId13"/>
+    <p:sldId id="299" r:id="rId14"/>
+    <p:sldId id="300" r:id="rId15"/>
+    <p:sldId id="301" r:id="rId16"/>
+    <p:sldId id="302" r:id="rId17"/>
+    <p:sldId id="305" r:id="rId18"/>
+    <p:sldId id="307" r:id="rId19"/>
+    <p:sldId id="308" r:id="rId20"/>
+    <p:sldId id="309" r:id="rId21"/>
+    <p:sldId id="310" r:id="rId22"/>
+    <p:sldId id="311" r:id="rId23"/>
+    <p:sldId id="312" r:id="rId24"/>
+    <p:sldId id="313" r:id="rId25"/>
+    <p:sldId id="321" r:id="rId26"/>
+    <p:sldId id="322" r:id="rId27"/>
+    <p:sldId id="306" r:id="rId28"/>
+    <p:sldId id="332" r:id="rId29"/>
+    <p:sldId id="314" r:id="rId30"/>
+    <p:sldId id="323" r:id="rId31"/>
+    <p:sldId id="333" r:id="rId32"/>
+    <p:sldId id="303" r:id="rId33"/>
+    <p:sldId id="324" r:id="rId34"/>
+    <p:sldId id="325" r:id="rId35"/>
+    <p:sldId id="326" r:id="rId36"/>
+    <p:sldId id="327" r:id="rId37"/>
+    <p:sldId id="334" r:id="rId38"/>
+    <p:sldId id="304" r:id="rId39"/>
+    <p:sldId id="328" r:id="rId40"/>
+    <p:sldId id="295" r:id="rId41"/>
+    <p:sldId id="329" r:id="rId42"/>
+    <p:sldId id="291" r:id="rId43"/>
+    <p:sldId id="292" r:id="rId44"/>
   </p:sldIdLst>
   <p:sldSz cx="12192000" cy="6858000"/>
   <p:notesSz cx="6858000" cy="9144000"/>
@@ -235,7 +239,7 @@
           <a:p>
             <a:fld id="{46A758EB-509B-4CCF-8AD3-97A8A991C7FF}" type="datetimeFigureOut">
               <a:rPr lang="en-US" smtClean="0"/>
-              <a:t>9/24/2025</a:t>
+              <a:t>9/29/2025</a:t>
             </a:fld>
             <a:endParaRPr lang="en-US"/>
           </a:p>
@@ -687,7 +691,7 @@
           <a:p>
             <a:fld id="{C4D53D78-2354-48EA-98FF-9805F4E9985B}" type="datetimeFigureOut">
               <a:rPr lang="en-US" smtClean="0"/>
-              <a:t>9/24/2025</a:t>
+              <a:t>9/29/2025</a:t>
             </a:fld>
             <a:endParaRPr lang="en-US"/>
           </a:p>
@@ -985,7 +989,7 @@
           <a:p>
             <a:fld id="{C4D53D78-2354-48EA-98FF-9805F4E9985B}" type="datetimeFigureOut">
               <a:rPr lang="en-US" smtClean="0"/>
-              <a:t>9/24/2025</a:t>
+              <a:t>9/29/2025</a:t>
             </a:fld>
             <a:endParaRPr lang="en-US"/>
           </a:p>
@@ -1177,7 +1181,7 @@
           <a:p>
             <a:fld id="{C4D53D78-2354-48EA-98FF-9805F4E9985B}" type="datetimeFigureOut">
               <a:rPr lang="en-US" smtClean="0"/>
-              <a:t>9/24/2025</a:t>
+              <a:t>9/29/2025</a:t>
             </a:fld>
             <a:endParaRPr lang="en-US"/>
           </a:p>
@@ -1438,7 +1442,7 @@
           <a:p>
             <a:fld id="{C4D53D78-2354-48EA-98FF-9805F4E9985B}" type="datetimeFigureOut">
               <a:rPr lang="en-US" smtClean="0"/>
-              <a:t>9/24/2025</a:t>
+              <a:t>9/29/2025</a:t>
             </a:fld>
             <a:endParaRPr lang="en-US"/>
           </a:p>
@@ -1862,7 +1866,7 @@
           <a:p>
             <a:fld id="{C4D53D78-2354-48EA-98FF-9805F4E9985B}" type="datetimeFigureOut">
               <a:rPr lang="en-US" smtClean="0"/>
-              <a:t>9/24/2025</a:t>
+              <a:t>9/29/2025</a:t>
             </a:fld>
             <a:endParaRPr lang="en-US"/>
           </a:p>
@@ -2399,7 +2403,7 @@
           <a:p>
             <a:fld id="{C4D53D78-2354-48EA-98FF-9805F4E9985B}" type="datetimeFigureOut">
               <a:rPr lang="en-US" smtClean="0"/>
-              <a:t>9/24/2025</a:t>
+              <a:t>9/29/2025</a:t>
             </a:fld>
             <a:endParaRPr lang="en-US"/>
           </a:p>
@@ -3263,7 +3267,7 @@
           <a:p>
             <a:fld id="{C4D53D78-2354-48EA-98FF-9805F4E9985B}" type="datetimeFigureOut">
               <a:rPr lang="en-US" smtClean="0"/>
-              <a:t>9/24/2025</a:t>
+              <a:t>9/29/2025</a:t>
             </a:fld>
             <a:endParaRPr lang="en-US"/>
           </a:p>
@@ -3433,7 +3437,7 @@
           <a:p>
             <a:fld id="{C4D53D78-2354-48EA-98FF-9805F4E9985B}" type="datetimeFigureOut">
               <a:rPr lang="en-US" smtClean="0"/>
-              <a:t>9/24/2025</a:t>
+              <a:t>9/29/2025</a:t>
             </a:fld>
             <a:endParaRPr lang="en-US"/>
           </a:p>
@@ -3617,7 +3621,7 @@
           <a:p>
             <a:fld id="{C4D53D78-2354-48EA-98FF-9805F4E9985B}" type="datetimeFigureOut">
               <a:rPr lang="en-US" smtClean="0"/>
-              <a:t>9/24/2025</a:t>
+              <a:t>9/29/2025</a:t>
             </a:fld>
             <a:endParaRPr lang="en-US"/>
           </a:p>
@@ -3787,7 +3791,7 @@
           <a:p>
             <a:fld id="{C4D53D78-2354-48EA-98FF-9805F4E9985B}" type="datetimeFigureOut">
               <a:rPr lang="en-US" smtClean="0"/>
-              <a:t>9/24/2025</a:t>
+              <a:t>9/29/2025</a:t>
             </a:fld>
             <a:endParaRPr lang="en-US"/>
           </a:p>
@@ -4031,7 +4035,7 @@
           <a:p>
             <a:fld id="{C4D53D78-2354-48EA-98FF-9805F4E9985B}" type="datetimeFigureOut">
               <a:rPr lang="en-US" smtClean="0"/>
-              <a:t>9/24/2025</a:t>
+              <a:t>9/29/2025</a:t>
             </a:fld>
             <a:endParaRPr lang="en-US"/>
           </a:p>
@@ -4267,7 +4271,7 @@
           <a:p>
             <a:fld id="{C4D53D78-2354-48EA-98FF-9805F4E9985B}" type="datetimeFigureOut">
               <a:rPr lang="en-US" smtClean="0"/>
-              <a:t>9/24/2025</a:t>
+              <a:t>9/29/2025</a:t>
             </a:fld>
             <a:endParaRPr lang="en-US"/>
           </a:p>
@@ -4733,7 +4737,7 @@
           <a:p>
             <a:fld id="{C4D53D78-2354-48EA-98FF-9805F4E9985B}" type="datetimeFigureOut">
               <a:rPr lang="en-US" smtClean="0"/>
-              <a:t>9/24/2025</a:t>
+              <a:t>9/29/2025</a:t>
             </a:fld>
             <a:endParaRPr lang="en-US"/>
           </a:p>
@@ -4851,7 +4855,7 @@
           <a:p>
             <a:fld id="{C4D53D78-2354-48EA-98FF-9805F4E9985B}" type="datetimeFigureOut">
               <a:rPr lang="en-US" smtClean="0"/>
-              <a:t>9/24/2025</a:t>
+              <a:t>9/29/2025</a:t>
             </a:fld>
             <a:endParaRPr lang="en-US"/>
           </a:p>
@@ -4946,7 +4950,7 @@
           <a:p>
             <a:fld id="{C4D53D78-2354-48EA-98FF-9805F4E9985B}" type="datetimeFigureOut">
               <a:rPr lang="en-US" smtClean="0"/>
-              <a:t>9/24/2025</a:t>
+              <a:t>9/29/2025</a:t>
             </a:fld>
             <a:endParaRPr lang="en-US"/>
           </a:p>
@@ -5201,7 +5205,7 @@
           <a:p>
             <a:fld id="{C4D53D78-2354-48EA-98FF-9805F4E9985B}" type="datetimeFigureOut">
               <a:rPr lang="en-US" smtClean="0"/>
-              <a:t>9/24/2025</a:t>
+              <a:t>9/29/2025</a:t>
             </a:fld>
             <a:endParaRPr lang="en-US"/>
           </a:p>
@@ -5501,7 +5505,7 @@
           <a:p>
             <a:fld id="{C4D53D78-2354-48EA-98FF-9805F4E9985B}" type="datetimeFigureOut">
               <a:rPr lang="en-US" smtClean="0"/>
-              <a:t>9/24/2025</a:t>
+              <a:t>9/29/2025</a:t>
             </a:fld>
             <a:endParaRPr lang="en-US"/>
           </a:p>
@@ -5735,7 +5739,7 @@
           <a:p>
             <a:fld id="{C4D53D78-2354-48EA-98FF-9805F4E9985B}" type="datetimeFigureOut">
               <a:rPr lang="en-US" smtClean="0"/>
-              <a:t>9/24/2025</a:t>
+              <a:t>9/29/2025</a:t>
             </a:fld>
             <a:endParaRPr lang="en-US"/>
           </a:p>
@@ -6771,6 +6775,105 @@
   <p:cSld>
     <p:spTree>
       <p:nvGrpSpPr>
+        <p:cNvPr id="1" name="">
+          <a:extLst>
+            <a:ext uri="{FF2B5EF4-FFF2-40B4-BE49-F238E27FC236}">
+              <a16:creationId xmlns:a16="http://schemas.microsoft.com/office/drawing/2014/main" id="{06645939-446F-9CF4-DFEF-15AF23969E95}"/>
+            </a:ext>
+          </a:extLst>
+        </p:cNvPr>
+        <p:cNvGrpSpPr/>
+        <p:nvPr/>
+      </p:nvGrpSpPr>
+      <p:grpSpPr>
+        <a:xfrm>
+          <a:off x="0" y="0"/>
+          <a:ext cx="0" cy="0"/>
+          <a:chOff x="0" y="0"/>
+          <a:chExt cx="0" cy="0"/>
+        </a:xfrm>
+      </p:grpSpPr>
+      <p:sp>
+        <p:nvSpPr>
+          <p:cNvPr id="2" name="Title 1">
+            <a:extLst>
+              <a:ext uri="{FF2B5EF4-FFF2-40B4-BE49-F238E27FC236}">
+                <a16:creationId xmlns:a16="http://schemas.microsoft.com/office/drawing/2014/main" id="{B8D94F73-6837-09C0-1ADC-9600FD14237C}"/>
+              </a:ext>
+            </a:extLst>
+          </p:cNvPr>
+          <p:cNvSpPr>
+            <a:spLocks noGrp="1"/>
+          </p:cNvSpPr>
+          <p:nvPr>
+            <p:ph type="title"/>
+          </p:nvPr>
+        </p:nvSpPr>
+        <p:spPr>
+          <a:xfrm>
+            <a:off x="913794" y="80211"/>
+            <a:ext cx="10353762" cy="970450"/>
+          </a:xfrm>
+        </p:spPr>
+        <p:txBody>
+          <a:bodyPr/>
+          <a:lstStyle/>
+          <a:p>
+            <a:r>
+              <a:rPr lang="en-US" dirty="0"/>
+              <a:t>Inspect the Code | ERD v0.3</a:t>
+            </a:r>
+          </a:p>
+        </p:txBody>
+      </p:sp>
+      <p:pic>
+        <p:nvPicPr>
+          <p:cNvPr id="4" name="Picture 3">
+            <a:extLst>
+              <a:ext uri="{FF2B5EF4-FFF2-40B4-BE49-F238E27FC236}">
+                <a16:creationId xmlns:a16="http://schemas.microsoft.com/office/drawing/2014/main" id="{A479E506-2E2E-7E64-819B-5F6809006579}"/>
+              </a:ext>
+            </a:extLst>
+          </p:cNvPr>
+          <p:cNvPicPr>
+            <a:picLocks noChangeAspect="1"/>
+          </p:cNvPicPr>
+          <p:nvPr/>
+        </p:nvPicPr>
+        <p:blipFill>
+          <a:blip r:embed="rId2"/>
+          <a:stretch>
+            <a:fillRect/>
+          </a:stretch>
+        </p:blipFill>
+        <p:spPr>
+          <a:xfrm>
+            <a:off x="1395916" y="1050661"/>
+            <a:ext cx="9389517" cy="5633710"/>
+          </a:xfrm>
+          <a:prstGeom prst="rect">
+            <a:avLst/>
+          </a:prstGeom>
+        </p:spPr>
+      </p:pic>
+    </p:spTree>
+    <p:extLst>
+      <p:ext uri="{BB962C8B-B14F-4D97-AF65-F5344CB8AC3E}">
+        <p14:creationId xmlns:p14="http://schemas.microsoft.com/office/powerpoint/2010/main" val="1024211096"/>
+      </p:ext>
+    </p:extLst>
+  </p:cSld>
+  <p:clrMapOvr>
+    <a:masterClrMapping/>
+  </p:clrMapOvr>
+</p:sld>
+</file>
+
+<file path=ppt/slides/slide11.xml><?xml version="1.0" encoding="utf-8"?>
+<p:sld xmlns:a="http://schemas.openxmlformats.org/drawingml/2006/main" xmlns:r="http://schemas.openxmlformats.org/officeDocument/2006/relationships" xmlns:p="http://schemas.openxmlformats.org/presentationml/2006/main">
+  <p:cSld>
+    <p:spTree>
+      <p:nvGrpSpPr>
         <p:cNvPr id="1" name=""/>
         <p:cNvGrpSpPr/>
         <p:nvPr/>
@@ -6930,7 +7033,7 @@
 </p:sld>
 </file>
 
-<file path=ppt/slides/slide11.xml><?xml version="1.0" encoding="utf-8"?>
+<file path=ppt/slides/slide12.xml><?xml version="1.0" encoding="utf-8"?>
 <p:sld xmlns:a="http://schemas.openxmlformats.org/drawingml/2006/main" xmlns:r="http://schemas.openxmlformats.org/officeDocument/2006/relationships" xmlns:p="http://schemas.openxmlformats.org/presentationml/2006/main">
   <p:cSld>
     <p:bg>
@@ -7001,7 +7104,7 @@
             </a:pPr>
             <a:r>
               <a:rPr lang="en-US" sz="3400" dirty="0"/>
-              <a:t>Inspect the Code | Demo Time</a:t>
+              <a:t>Inspect the Code | Iteration 0</a:t>
             </a:r>
           </a:p>
         </p:txBody>
@@ -7033,6 +7136,12 @@
             <a:normAutofit/>
           </a:bodyPr>
           <a:lstStyle/>
+          <a:p>
+            <a:r>
+              <a:rPr lang="en-US" dirty="0"/>
+              <a:t>Demo Time!</a:t>
+            </a:r>
+          </a:p>
           <a:p>
             <a:r>
               <a:rPr lang="en-US" dirty="0"/>
@@ -7135,7 +7244,7 @@
 </p:sld>
 </file>
 
-<file path=ppt/slides/slide12.xml><?xml version="1.0" encoding="utf-8"?>
+<file path=ppt/slides/slide13.xml><?xml version="1.0" encoding="utf-8"?>
 <p:sld xmlns:a="http://schemas.openxmlformats.org/drawingml/2006/main" xmlns:r="http://schemas.openxmlformats.org/officeDocument/2006/relationships" xmlns:p="http://schemas.openxmlformats.org/presentationml/2006/main">
   <p:cSld>
     <p:spTree>
@@ -7335,7 +7444,7 @@
 </p:sld>
 </file>
 
-<file path=ppt/slides/slide13.xml><?xml version="1.0" encoding="utf-8"?>
+<file path=ppt/slides/slide14.xml><?xml version="1.0" encoding="utf-8"?>
 <p:sld xmlns:a="http://schemas.openxmlformats.org/drawingml/2006/main" xmlns:r="http://schemas.openxmlformats.org/officeDocument/2006/relationships" xmlns:p="http://schemas.openxmlformats.org/presentationml/2006/main">
   <p:cSld>
     <p:spTree>
@@ -7491,7 +7600,7 @@
 </p:sld>
 </file>
 
-<file path=ppt/slides/slide14.xml><?xml version="1.0" encoding="utf-8"?>
+<file path=ppt/slides/slide15.xml><?xml version="1.0" encoding="utf-8"?>
 <p:sld xmlns:a="http://schemas.openxmlformats.org/drawingml/2006/main" xmlns:r="http://schemas.openxmlformats.org/officeDocument/2006/relationships" xmlns:p="http://schemas.openxmlformats.org/presentationml/2006/main">
   <p:cSld>
     <p:spTree>
@@ -7653,7 +7762,7 @@
 </p:sld>
 </file>
 
-<file path=ppt/slides/slide15.xml><?xml version="1.0" encoding="utf-8"?>
+<file path=ppt/slides/slide16.xml><?xml version="1.0" encoding="utf-8"?>
 <p:sld xmlns:a="http://schemas.openxmlformats.org/drawingml/2006/main" xmlns:r="http://schemas.openxmlformats.org/officeDocument/2006/relationships" xmlns:p="http://schemas.openxmlformats.org/presentationml/2006/main">
   <p:cSld>
     <p:bg>
@@ -7924,7 +8033,7 @@
 </p:sld>
 </file>
 
-<file path=ppt/slides/slide16.xml><?xml version="1.0" encoding="utf-8"?>
+<file path=ppt/slides/slide17.xml><?xml version="1.0" encoding="utf-8"?>
 <p:sld xmlns:a="http://schemas.openxmlformats.org/drawingml/2006/main" xmlns:r="http://schemas.openxmlformats.org/officeDocument/2006/relationships" xmlns:p="http://schemas.openxmlformats.org/presentationml/2006/main">
   <p:cSld>
     <p:spTree>
@@ -8556,7 +8665,7 @@
 </p:sld>
 </file>
 
-<file path=ppt/slides/slide17.xml><?xml version="1.0" encoding="utf-8"?>
+<file path=ppt/slides/slide18.xml><?xml version="1.0" encoding="utf-8"?>
 <p:sld xmlns:a="http://schemas.openxmlformats.org/drawingml/2006/main" xmlns:r="http://schemas.openxmlformats.org/officeDocument/2006/relationships" xmlns:p="http://schemas.openxmlformats.org/presentationml/2006/main">
   <p:cSld>
     <p:spTree>
@@ -8790,7 +8899,7 @@
 </p:sld>
 </file>
 
-<file path=ppt/slides/slide18.xml><?xml version="1.0" encoding="utf-8"?>
+<file path=ppt/slides/slide19.xml><?xml version="1.0" encoding="utf-8"?>
 <p:sld xmlns:a="http://schemas.openxmlformats.org/drawingml/2006/main" xmlns:r="http://schemas.openxmlformats.org/officeDocument/2006/relationships" xmlns:p="http://schemas.openxmlformats.org/presentationml/2006/main">
   <p:cSld>
     <p:spTree>
@@ -9457,508 +9566,6 @@
     <p:extLst>
       <p:ext uri="{BB962C8B-B14F-4D97-AF65-F5344CB8AC3E}">
         <p14:creationId xmlns:p14="http://schemas.microsoft.com/office/powerpoint/2010/main" val="2085508279"/>
-      </p:ext>
-    </p:extLst>
-  </p:cSld>
-  <p:clrMapOvr>
-    <a:masterClrMapping/>
-  </p:clrMapOvr>
-</p:sld>
-</file>
-
-<file path=ppt/slides/slide19.xml><?xml version="1.0" encoding="utf-8"?>
-<p:sld xmlns:a="http://schemas.openxmlformats.org/drawingml/2006/main" xmlns:r="http://schemas.openxmlformats.org/officeDocument/2006/relationships" xmlns:p="http://schemas.openxmlformats.org/presentationml/2006/main">
-  <p:cSld>
-    <p:spTree>
-      <p:nvGrpSpPr>
-        <p:cNvPr id="1" name="">
-          <a:extLst>
-            <a:ext uri="{FF2B5EF4-FFF2-40B4-BE49-F238E27FC236}">
-              <a16:creationId xmlns:a16="http://schemas.microsoft.com/office/drawing/2014/main" id="{A8A2FCF6-55D7-3A29-3574-ACE1B59DA10F}"/>
-            </a:ext>
-          </a:extLst>
-        </p:cNvPr>
-        <p:cNvGrpSpPr/>
-        <p:nvPr/>
-      </p:nvGrpSpPr>
-      <p:grpSpPr>
-        <a:xfrm>
-          <a:off x="0" y="0"/>
-          <a:ext cx="0" cy="0"/>
-          <a:chOff x="0" y="0"/>
-          <a:chExt cx="0" cy="0"/>
-        </a:xfrm>
-      </p:grpSpPr>
-      <p:sp>
-        <p:nvSpPr>
-          <p:cNvPr id="2" name="Title 1">
-            <a:extLst>
-              <a:ext uri="{FF2B5EF4-FFF2-40B4-BE49-F238E27FC236}">
-                <a16:creationId xmlns:a16="http://schemas.microsoft.com/office/drawing/2014/main" id="{4B19E7B7-AE87-1773-382D-31205B3B033D}"/>
-              </a:ext>
-            </a:extLst>
-          </p:cNvPr>
-          <p:cNvSpPr>
-            <a:spLocks noGrp="1"/>
-          </p:cNvSpPr>
-          <p:nvPr>
-            <p:ph type="title"/>
-          </p:nvPr>
-        </p:nvSpPr>
-        <p:spPr/>
-        <p:txBody>
-          <a:bodyPr/>
-          <a:lstStyle/>
-          <a:p>
-            <a:r>
-              <a:rPr lang="en-US" dirty="0"/>
-              <a:t>Sec-Basics | Tokens &amp; Secrets Lifecycle</a:t>
-            </a:r>
-          </a:p>
-        </p:txBody>
-      </p:sp>
-      <p:sp>
-        <p:nvSpPr>
-          <p:cNvPr id="4" name="Content Placeholder 2">
-            <a:extLst>
-              <a:ext uri="{FF2B5EF4-FFF2-40B4-BE49-F238E27FC236}">
-                <a16:creationId xmlns:a16="http://schemas.microsoft.com/office/drawing/2014/main" id="{838FD4EB-174E-0B14-CF17-0A96AB2A88DA}"/>
-              </a:ext>
-            </a:extLst>
-          </p:cNvPr>
-          <p:cNvSpPr txBox="1">
-            <a:spLocks/>
-          </p:cNvSpPr>
-          <p:nvPr/>
-        </p:nvSpPr>
-        <p:spPr>
-          <a:xfrm>
-            <a:off x="685800" y="1705017"/>
-            <a:ext cx="5671429" cy="4631775"/>
-          </a:xfrm>
-          <a:prstGeom prst="rect">
-            <a:avLst/>
-          </a:prstGeom>
-          <a:effectLst>
-            <a:outerShdw blurRad="25400" dir="17880000">
-              <a:srgbClr val="000000">
-                <a:alpha val="46000"/>
-              </a:srgbClr>
-            </a:outerShdw>
-          </a:effectLst>
-        </p:spPr>
-        <p:txBody>
-          <a:bodyPr vert="horz" lIns="91440" tIns="45720" rIns="91440" bIns="45720" rtlCol="0" anchor="t">
-            <a:normAutofit/>
-          </a:bodyPr>
-          <a:lstStyle>
-            <a:lvl1pPr marL="342900" indent="-306000" algn="l" defTabSz="457200" rtl="0" eaLnBrk="1" latinLnBrk="0" hangingPunct="1">
-              <a:spcBef>
-                <a:spcPct val="20000"/>
-              </a:spcBef>
-              <a:spcAft>
-                <a:spcPts val="600"/>
-              </a:spcAft>
-              <a:buClr>
-                <a:schemeClr val="tx2"/>
-              </a:buClr>
-              <a:buSzPct val="70000"/>
-              <a:buFont typeface="Wingdings 2" charset="2"/>
-              <a:buChar char=""/>
-              <a:defRPr sz="2000" kern="1200">
-                <a:ln>
-                  <a:solidFill>
-                    <a:schemeClr val="bg1">
-                      <a:lumMod val="75000"/>
-                      <a:lumOff val="25000"/>
-                      <a:alpha val="10000"/>
-                    </a:schemeClr>
-                  </a:solidFill>
-                </a:ln>
-                <a:solidFill>
-                  <a:schemeClr val="tx2"/>
-                </a:solidFill>
-                <a:effectLst>
-                  <a:outerShdw blurRad="9525" dist="25400" dir="14640000" algn="tl" rotWithShape="0">
-                    <a:schemeClr val="bg1">
-                      <a:alpha val="30000"/>
-                    </a:schemeClr>
-                  </a:outerShdw>
-                </a:effectLst>
-                <a:latin typeface="+mn-lt"/>
-                <a:ea typeface="+mn-ea"/>
-                <a:cs typeface="+mn-cs"/>
-              </a:defRPr>
-            </a:lvl1pPr>
-            <a:lvl2pPr marL="720000" indent="-270000" algn="l" defTabSz="457200" rtl="0" eaLnBrk="1" latinLnBrk="0" hangingPunct="1">
-              <a:spcBef>
-                <a:spcPct val="20000"/>
-              </a:spcBef>
-              <a:spcAft>
-                <a:spcPts val="600"/>
-              </a:spcAft>
-              <a:buClr>
-                <a:schemeClr val="tx2"/>
-              </a:buClr>
-              <a:buSzPct val="70000"/>
-              <a:buFont typeface="Wingdings 2" charset="2"/>
-              <a:buChar char=""/>
-              <a:defRPr sz="1800" kern="1200">
-                <a:ln>
-                  <a:solidFill>
-                    <a:schemeClr val="bg1">
-                      <a:lumMod val="75000"/>
-                      <a:lumOff val="25000"/>
-                      <a:alpha val="10000"/>
-                    </a:schemeClr>
-                  </a:solidFill>
-                </a:ln>
-                <a:solidFill>
-                  <a:schemeClr val="tx2"/>
-                </a:solidFill>
-                <a:effectLst>
-                  <a:outerShdw blurRad="9525" dist="25400" dir="14640000" algn="tl" rotWithShape="0">
-                    <a:schemeClr val="bg1">
-                      <a:alpha val="30000"/>
-                    </a:schemeClr>
-                  </a:outerShdw>
-                </a:effectLst>
-                <a:latin typeface="+mn-lt"/>
-                <a:ea typeface="+mn-ea"/>
-                <a:cs typeface="+mn-cs"/>
-              </a:defRPr>
-            </a:lvl2pPr>
-            <a:lvl3pPr marL="1026000" indent="-216000" algn="l" defTabSz="457200" rtl="0" eaLnBrk="1" latinLnBrk="0" hangingPunct="1">
-              <a:spcBef>
-                <a:spcPct val="20000"/>
-              </a:spcBef>
-              <a:spcAft>
-                <a:spcPts val="600"/>
-              </a:spcAft>
-              <a:buClr>
-                <a:schemeClr val="tx2"/>
-              </a:buClr>
-              <a:buSzPct val="70000"/>
-              <a:buFont typeface="Wingdings 2" charset="2"/>
-              <a:buChar char=""/>
-              <a:defRPr sz="1600" kern="1200">
-                <a:ln>
-                  <a:solidFill>
-                    <a:schemeClr val="bg1">
-                      <a:lumMod val="75000"/>
-                      <a:lumOff val="25000"/>
-                      <a:alpha val="10000"/>
-                    </a:schemeClr>
-                  </a:solidFill>
-                </a:ln>
-                <a:solidFill>
-                  <a:schemeClr val="tx2"/>
-                </a:solidFill>
-                <a:effectLst>
-                  <a:outerShdw blurRad="9525" dist="25400" dir="14640000" algn="tl" rotWithShape="0">
-                    <a:schemeClr val="bg1">
-                      <a:alpha val="30000"/>
-                    </a:schemeClr>
-                  </a:outerShdw>
-                </a:effectLst>
-                <a:latin typeface="+mn-lt"/>
-                <a:ea typeface="+mn-ea"/>
-                <a:cs typeface="+mn-cs"/>
-              </a:defRPr>
-            </a:lvl3pPr>
-            <a:lvl4pPr marL="1386000" indent="-216000" algn="l" defTabSz="457200" rtl="0" eaLnBrk="1" latinLnBrk="0" hangingPunct="1">
-              <a:spcBef>
-                <a:spcPct val="20000"/>
-              </a:spcBef>
-              <a:spcAft>
-                <a:spcPts val="600"/>
-              </a:spcAft>
-              <a:buClr>
-                <a:schemeClr val="tx2"/>
-              </a:buClr>
-              <a:buSzPct val="70000"/>
-              <a:buFont typeface="Wingdings 2" charset="2"/>
-              <a:buChar char=""/>
-              <a:defRPr sz="1400" kern="1200">
-                <a:ln>
-                  <a:solidFill>
-                    <a:schemeClr val="bg1">
-                      <a:lumMod val="75000"/>
-                      <a:lumOff val="25000"/>
-                      <a:alpha val="10000"/>
-                    </a:schemeClr>
-                  </a:solidFill>
-                </a:ln>
-                <a:solidFill>
-                  <a:schemeClr val="tx2"/>
-                </a:solidFill>
-                <a:effectLst>
-                  <a:outerShdw blurRad="9525" dist="25400" dir="14640000" algn="tl" rotWithShape="0">
-                    <a:schemeClr val="bg1">
-                      <a:alpha val="30000"/>
-                    </a:schemeClr>
-                  </a:outerShdw>
-                </a:effectLst>
-                <a:latin typeface="+mn-lt"/>
-                <a:ea typeface="+mn-ea"/>
-                <a:cs typeface="+mn-cs"/>
-              </a:defRPr>
-            </a:lvl4pPr>
-            <a:lvl5pPr marL="1674000" indent="-216000" algn="l" defTabSz="457200" rtl="0" eaLnBrk="1" latinLnBrk="0" hangingPunct="1">
-              <a:spcBef>
-                <a:spcPct val="20000"/>
-              </a:spcBef>
-              <a:spcAft>
-                <a:spcPts val="600"/>
-              </a:spcAft>
-              <a:buClr>
-                <a:schemeClr val="tx2"/>
-              </a:buClr>
-              <a:buSzPct val="70000"/>
-              <a:buFont typeface="Wingdings 2" charset="2"/>
-              <a:buChar char=""/>
-              <a:defRPr sz="1400" kern="1200">
-                <a:ln>
-                  <a:solidFill>
-                    <a:schemeClr val="bg1">
-                      <a:lumMod val="75000"/>
-                      <a:lumOff val="25000"/>
-                      <a:alpha val="10000"/>
-                    </a:schemeClr>
-                  </a:solidFill>
-                </a:ln>
-                <a:solidFill>
-                  <a:schemeClr val="tx2"/>
-                </a:solidFill>
-                <a:effectLst>
-                  <a:outerShdw blurRad="9525" dist="25400" dir="14640000" algn="tl" rotWithShape="0">
-                    <a:schemeClr val="bg1">
-                      <a:alpha val="30000"/>
-                    </a:schemeClr>
-                  </a:outerShdw>
-                </a:effectLst>
-                <a:latin typeface="+mn-lt"/>
-                <a:ea typeface="+mn-ea"/>
-                <a:cs typeface="+mn-cs"/>
-              </a:defRPr>
-            </a:lvl5pPr>
-            <a:lvl6pPr marL="2014600" indent="-228600" algn="l" defTabSz="457200" rtl="0" eaLnBrk="1" latinLnBrk="0" hangingPunct="1">
-              <a:spcBef>
-                <a:spcPct val="20000"/>
-              </a:spcBef>
-              <a:spcAft>
-                <a:spcPts val="600"/>
-              </a:spcAft>
-              <a:buClr>
-                <a:schemeClr val="tx2"/>
-              </a:buClr>
-              <a:buSzPct val="70000"/>
-              <a:buFont typeface="Wingdings 2" charset="2"/>
-              <a:buChar char=""/>
-              <a:defRPr sz="1400" kern="1200">
-                <a:ln>
-                  <a:solidFill>
-                    <a:schemeClr val="bg1">
-                      <a:lumMod val="75000"/>
-                      <a:lumOff val="25000"/>
-                      <a:alpha val="10000"/>
-                    </a:schemeClr>
-                  </a:solidFill>
-                </a:ln>
-                <a:solidFill>
-                  <a:schemeClr val="tx2"/>
-                </a:solidFill>
-                <a:effectLst>
-                  <a:outerShdw blurRad="9525" dist="25400" dir="14640000" algn="tl" rotWithShape="0">
-                    <a:schemeClr val="bg1">
-                      <a:alpha val="30000"/>
-                    </a:schemeClr>
-                  </a:outerShdw>
-                </a:effectLst>
-                <a:latin typeface="+mn-lt"/>
-                <a:ea typeface="+mn-ea"/>
-                <a:cs typeface="+mn-cs"/>
-              </a:defRPr>
-            </a:lvl6pPr>
-            <a:lvl7pPr marL="2401800" indent="-228600" algn="l" defTabSz="457200" rtl="0" eaLnBrk="1" latinLnBrk="0" hangingPunct="1">
-              <a:spcBef>
-                <a:spcPct val="20000"/>
-              </a:spcBef>
-              <a:spcAft>
-                <a:spcPts val="600"/>
-              </a:spcAft>
-              <a:buClr>
-                <a:schemeClr val="tx2"/>
-              </a:buClr>
-              <a:buSzPct val="70000"/>
-              <a:buFont typeface="Wingdings 2" charset="2"/>
-              <a:buChar char=""/>
-              <a:defRPr sz="1400" kern="1200">
-                <a:ln>
-                  <a:solidFill>
-                    <a:schemeClr val="bg1">
-                      <a:lumMod val="75000"/>
-                      <a:lumOff val="25000"/>
-                      <a:alpha val="10000"/>
-                    </a:schemeClr>
-                  </a:solidFill>
-                </a:ln>
-                <a:solidFill>
-                  <a:schemeClr val="tx2"/>
-                </a:solidFill>
-                <a:effectLst>
-                  <a:outerShdw blurRad="9525" dist="25400" dir="14640000" algn="tl" rotWithShape="0">
-                    <a:schemeClr val="bg1">
-                      <a:alpha val="30000"/>
-                    </a:schemeClr>
-                  </a:outerShdw>
-                </a:effectLst>
-                <a:latin typeface="+mn-lt"/>
-                <a:ea typeface="+mn-ea"/>
-                <a:cs typeface="+mn-cs"/>
-              </a:defRPr>
-            </a:lvl7pPr>
-            <a:lvl8pPr marL="2789000" indent="-228600" algn="l" defTabSz="457200" rtl="0" eaLnBrk="1" latinLnBrk="0" hangingPunct="1">
-              <a:spcBef>
-                <a:spcPct val="20000"/>
-              </a:spcBef>
-              <a:spcAft>
-                <a:spcPts val="600"/>
-              </a:spcAft>
-              <a:buClr>
-                <a:schemeClr val="tx2"/>
-              </a:buClr>
-              <a:buSzPct val="70000"/>
-              <a:buFont typeface="Wingdings 2" charset="2"/>
-              <a:buChar char=""/>
-              <a:defRPr sz="1400" kern="1200">
-                <a:ln>
-                  <a:solidFill>
-                    <a:schemeClr val="bg1">
-                      <a:lumMod val="75000"/>
-                      <a:lumOff val="25000"/>
-                      <a:alpha val="10000"/>
-                    </a:schemeClr>
-                  </a:solidFill>
-                </a:ln>
-                <a:solidFill>
-                  <a:schemeClr val="tx2"/>
-                </a:solidFill>
-                <a:effectLst>
-                  <a:outerShdw blurRad="9525" dist="25400" dir="14640000" algn="tl" rotWithShape="0">
-                    <a:schemeClr val="bg1">
-                      <a:alpha val="30000"/>
-                    </a:schemeClr>
-                  </a:outerShdw>
-                </a:effectLst>
-                <a:latin typeface="+mn-lt"/>
-                <a:ea typeface="+mn-ea"/>
-                <a:cs typeface="+mn-cs"/>
-              </a:defRPr>
-            </a:lvl8pPr>
-            <a:lvl9pPr marL="3106200" indent="-228600" algn="l" defTabSz="457200" rtl="0" eaLnBrk="1" latinLnBrk="0" hangingPunct="1">
-              <a:spcBef>
-                <a:spcPct val="20000"/>
-              </a:spcBef>
-              <a:spcAft>
-                <a:spcPts val="600"/>
-              </a:spcAft>
-              <a:buClr>
-                <a:schemeClr val="tx2"/>
-              </a:buClr>
-              <a:buSzPct val="70000"/>
-              <a:buFont typeface="Wingdings 2" charset="2"/>
-              <a:buChar char=""/>
-              <a:defRPr sz="1400" kern="1200">
-                <a:ln>
-                  <a:solidFill>
-                    <a:schemeClr val="bg1">
-                      <a:lumMod val="75000"/>
-                      <a:lumOff val="25000"/>
-                      <a:alpha val="10000"/>
-                    </a:schemeClr>
-                  </a:solidFill>
-                </a:ln>
-                <a:solidFill>
-                  <a:schemeClr val="tx2"/>
-                </a:solidFill>
-                <a:effectLst>
-                  <a:outerShdw blurRad="9525" dist="25400" dir="14640000" algn="tl" rotWithShape="0">
-                    <a:schemeClr val="bg1">
-                      <a:alpha val="30000"/>
-                    </a:schemeClr>
-                  </a:outerShdw>
-                </a:effectLst>
-                <a:latin typeface="+mn-lt"/>
-                <a:ea typeface="+mn-ea"/>
-                <a:cs typeface="+mn-cs"/>
-              </a:defRPr>
-            </a:lvl9pPr>
-          </a:lstStyle>
-          <a:p>
-            <a:r>
-              <a:rPr lang="en-US" dirty="0"/>
-              <a:t>Use short-lived access-tokens </a:t>
-            </a:r>
-          </a:p>
-          <a:p>
-            <a:r>
-              <a:rPr lang="en-US" dirty="0"/>
-              <a:t>Use refresh-tokens for long-lived sessions</a:t>
-            </a:r>
-          </a:p>
-          <a:p>
-            <a:r>
-              <a:rPr lang="en-US" dirty="0"/>
-              <a:t>Adopt tooling that allows you to revoke and/or rotate tokens (blacklists, token version, etc.)</a:t>
-            </a:r>
-          </a:p>
-          <a:p>
-            <a:r>
-              <a:rPr lang="en-US" dirty="0"/>
-              <a:t>Store secrets safely and effectively</a:t>
-            </a:r>
-          </a:p>
-          <a:p>
-            <a:pPr lvl="1"/>
-            <a:r>
-              <a:rPr lang="en-US" dirty="0"/>
-              <a:t>Use ENV vars</a:t>
-            </a:r>
-          </a:p>
-          <a:p>
-            <a:pPr lvl="1"/>
-            <a:r>
-              <a:rPr lang="en-US" dirty="0"/>
-              <a:t>Secret stores (e.g., Thycotic, AWS Secret Manager)</a:t>
-            </a:r>
-          </a:p>
-          <a:p>
-            <a:r>
-              <a:rPr lang="en-US" dirty="0"/>
-              <a:t>Key management</a:t>
-            </a:r>
-          </a:p>
-          <a:p>
-            <a:pPr lvl="1"/>
-            <a:r>
-              <a:rPr lang="en-US" dirty="0"/>
-              <a:t>Rotate signing keys</a:t>
-            </a:r>
-          </a:p>
-          <a:p>
-            <a:pPr lvl="1"/>
-            <a:r>
-              <a:rPr lang="en-US" dirty="0"/>
-              <a:t>Asymmetric signing (public/private keys)</a:t>
-            </a:r>
-          </a:p>
-        </p:txBody>
-      </p:sp>
-    </p:spTree>
-    <p:extLst>
-      <p:ext uri="{BB962C8B-B14F-4D97-AF65-F5344CB8AC3E}">
-        <p14:creationId xmlns:p14="http://schemas.microsoft.com/office/powerpoint/2010/main" val="3723166035"/>
       </p:ext>
     </p:extLst>
   </p:cSld>
@@ -10282,6 +9889,508 @@
         <p:cNvPr id="1" name="">
           <a:extLst>
             <a:ext uri="{FF2B5EF4-FFF2-40B4-BE49-F238E27FC236}">
+              <a16:creationId xmlns:a16="http://schemas.microsoft.com/office/drawing/2014/main" id="{A8A2FCF6-55D7-3A29-3574-ACE1B59DA10F}"/>
+            </a:ext>
+          </a:extLst>
+        </p:cNvPr>
+        <p:cNvGrpSpPr/>
+        <p:nvPr/>
+      </p:nvGrpSpPr>
+      <p:grpSpPr>
+        <a:xfrm>
+          <a:off x="0" y="0"/>
+          <a:ext cx="0" cy="0"/>
+          <a:chOff x="0" y="0"/>
+          <a:chExt cx="0" cy="0"/>
+        </a:xfrm>
+      </p:grpSpPr>
+      <p:sp>
+        <p:nvSpPr>
+          <p:cNvPr id="2" name="Title 1">
+            <a:extLst>
+              <a:ext uri="{FF2B5EF4-FFF2-40B4-BE49-F238E27FC236}">
+                <a16:creationId xmlns:a16="http://schemas.microsoft.com/office/drawing/2014/main" id="{4B19E7B7-AE87-1773-382D-31205B3B033D}"/>
+              </a:ext>
+            </a:extLst>
+          </p:cNvPr>
+          <p:cNvSpPr>
+            <a:spLocks noGrp="1"/>
+          </p:cNvSpPr>
+          <p:nvPr>
+            <p:ph type="title"/>
+          </p:nvPr>
+        </p:nvSpPr>
+        <p:spPr/>
+        <p:txBody>
+          <a:bodyPr/>
+          <a:lstStyle/>
+          <a:p>
+            <a:r>
+              <a:rPr lang="en-US" dirty="0"/>
+              <a:t>Sec-Basics | Tokens &amp; Secrets Lifecycle</a:t>
+            </a:r>
+          </a:p>
+        </p:txBody>
+      </p:sp>
+      <p:sp>
+        <p:nvSpPr>
+          <p:cNvPr id="4" name="Content Placeholder 2">
+            <a:extLst>
+              <a:ext uri="{FF2B5EF4-FFF2-40B4-BE49-F238E27FC236}">
+                <a16:creationId xmlns:a16="http://schemas.microsoft.com/office/drawing/2014/main" id="{838FD4EB-174E-0B14-CF17-0A96AB2A88DA}"/>
+              </a:ext>
+            </a:extLst>
+          </p:cNvPr>
+          <p:cNvSpPr txBox="1">
+            <a:spLocks/>
+          </p:cNvSpPr>
+          <p:nvPr/>
+        </p:nvSpPr>
+        <p:spPr>
+          <a:xfrm>
+            <a:off x="685800" y="1705017"/>
+            <a:ext cx="5671429" cy="4631775"/>
+          </a:xfrm>
+          <a:prstGeom prst="rect">
+            <a:avLst/>
+          </a:prstGeom>
+          <a:effectLst>
+            <a:outerShdw blurRad="25400" dir="17880000">
+              <a:srgbClr val="000000">
+                <a:alpha val="46000"/>
+              </a:srgbClr>
+            </a:outerShdw>
+          </a:effectLst>
+        </p:spPr>
+        <p:txBody>
+          <a:bodyPr vert="horz" lIns="91440" tIns="45720" rIns="91440" bIns="45720" rtlCol="0" anchor="t">
+            <a:normAutofit/>
+          </a:bodyPr>
+          <a:lstStyle>
+            <a:lvl1pPr marL="342900" indent="-306000" algn="l" defTabSz="457200" rtl="0" eaLnBrk="1" latinLnBrk="0" hangingPunct="1">
+              <a:spcBef>
+                <a:spcPct val="20000"/>
+              </a:spcBef>
+              <a:spcAft>
+                <a:spcPts val="600"/>
+              </a:spcAft>
+              <a:buClr>
+                <a:schemeClr val="tx2"/>
+              </a:buClr>
+              <a:buSzPct val="70000"/>
+              <a:buFont typeface="Wingdings 2" charset="2"/>
+              <a:buChar char=""/>
+              <a:defRPr sz="2000" kern="1200">
+                <a:ln>
+                  <a:solidFill>
+                    <a:schemeClr val="bg1">
+                      <a:lumMod val="75000"/>
+                      <a:lumOff val="25000"/>
+                      <a:alpha val="10000"/>
+                    </a:schemeClr>
+                  </a:solidFill>
+                </a:ln>
+                <a:solidFill>
+                  <a:schemeClr val="tx2"/>
+                </a:solidFill>
+                <a:effectLst>
+                  <a:outerShdw blurRad="9525" dist="25400" dir="14640000" algn="tl" rotWithShape="0">
+                    <a:schemeClr val="bg1">
+                      <a:alpha val="30000"/>
+                    </a:schemeClr>
+                  </a:outerShdw>
+                </a:effectLst>
+                <a:latin typeface="+mn-lt"/>
+                <a:ea typeface="+mn-ea"/>
+                <a:cs typeface="+mn-cs"/>
+              </a:defRPr>
+            </a:lvl1pPr>
+            <a:lvl2pPr marL="720000" indent="-270000" algn="l" defTabSz="457200" rtl="0" eaLnBrk="1" latinLnBrk="0" hangingPunct="1">
+              <a:spcBef>
+                <a:spcPct val="20000"/>
+              </a:spcBef>
+              <a:spcAft>
+                <a:spcPts val="600"/>
+              </a:spcAft>
+              <a:buClr>
+                <a:schemeClr val="tx2"/>
+              </a:buClr>
+              <a:buSzPct val="70000"/>
+              <a:buFont typeface="Wingdings 2" charset="2"/>
+              <a:buChar char=""/>
+              <a:defRPr sz="1800" kern="1200">
+                <a:ln>
+                  <a:solidFill>
+                    <a:schemeClr val="bg1">
+                      <a:lumMod val="75000"/>
+                      <a:lumOff val="25000"/>
+                      <a:alpha val="10000"/>
+                    </a:schemeClr>
+                  </a:solidFill>
+                </a:ln>
+                <a:solidFill>
+                  <a:schemeClr val="tx2"/>
+                </a:solidFill>
+                <a:effectLst>
+                  <a:outerShdw blurRad="9525" dist="25400" dir="14640000" algn="tl" rotWithShape="0">
+                    <a:schemeClr val="bg1">
+                      <a:alpha val="30000"/>
+                    </a:schemeClr>
+                  </a:outerShdw>
+                </a:effectLst>
+                <a:latin typeface="+mn-lt"/>
+                <a:ea typeface="+mn-ea"/>
+                <a:cs typeface="+mn-cs"/>
+              </a:defRPr>
+            </a:lvl2pPr>
+            <a:lvl3pPr marL="1026000" indent="-216000" algn="l" defTabSz="457200" rtl="0" eaLnBrk="1" latinLnBrk="0" hangingPunct="1">
+              <a:spcBef>
+                <a:spcPct val="20000"/>
+              </a:spcBef>
+              <a:spcAft>
+                <a:spcPts val="600"/>
+              </a:spcAft>
+              <a:buClr>
+                <a:schemeClr val="tx2"/>
+              </a:buClr>
+              <a:buSzPct val="70000"/>
+              <a:buFont typeface="Wingdings 2" charset="2"/>
+              <a:buChar char=""/>
+              <a:defRPr sz="1600" kern="1200">
+                <a:ln>
+                  <a:solidFill>
+                    <a:schemeClr val="bg1">
+                      <a:lumMod val="75000"/>
+                      <a:lumOff val="25000"/>
+                      <a:alpha val="10000"/>
+                    </a:schemeClr>
+                  </a:solidFill>
+                </a:ln>
+                <a:solidFill>
+                  <a:schemeClr val="tx2"/>
+                </a:solidFill>
+                <a:effectLst>
+                  <a:outerShdw blurRad="9525" dist="25400" dir="14640000" algn="tl" rotWithShape="0">
+                    <a:schemeClr val="bg1">
+                      <a:alpha val="30000"/>
+                    </a:schemeClr>
+                  </a:outerShdw>
+                </a:effectLst>
+                <a:latin typeface="+mn-lt"/>
+                <a:ea typeface="+mn-ea"/>
+                <a:cs typeface="+mn-cs"/>
+              </a:defRPr>
+            </a:lvl3pPr>
+            <a:lvl4pPr marL="1386000" indent="-216000" algn="l" defTabSz="457200" rtl="0" eaLnBrk="1" latinLnBrk="0" hangingPunct="1">
+              <a:spcBef>
+                <a:spcPct val="20000"/>
+              </a:spcBef>
+              <a:spcAft>
+                <a:spcPts val="600"/>
+              </a:spcAft>
+              <a:buClr>
+                <a:schemeClr val="tx2"/>
+              </a:buClr>
+              <a:buSzPct val="70000"/>
+              <a:buFont typeface="Wingdings 2" charset="2"/>
+              <a:buChar char=""/>
+              <a:defRPr sz="1400" kern="1200">
+                <a:ln>
+                  <a:solidFill>
+                    <a:schemeClr val="bg1">
+                      <a:lumMod val="75000"/>
+                      <a:lumOff val="25000"/>
+                      <a:alpha val="10000"/>
+                    </a:schemeClr>
+                  </a:solidFill>
+                </a:ln>
+                <a:solidFill>
+                  <a:schemeClr val="tx2"/>
+                </a:solidFill>
+                <a:effectLst>
+                  <a:outerShdw blurRad="9525" dist="25400" dir="14640000" algn="tl" rotWithShape="0">
+                    <a:schemeClr val="bg1">
+                      <a:alpha val="30000"/>
+                    </a:schemeClr>
+                  </a:outerShdw>
+                </a:effectLst>
+                <a:latin typeface="+mn-lt"/>
+                <a:ea typeface="+mn-ea"/>
+                <a:cs typeface="+mn-cs"/>
+              </a:defRPr>
+            </a:lvl4pPr>
+            <a:lvl5pPr marL="1674000" indent="-216000" algn="l" defTabSz="457200" rtl="0" eaLnBrk="1" latinLnBrk="0" hangingPunct="1">
+              <a:spcBef>
+                <a:spcPct val="20000"/>
+              </a:spcBef>
+              <a:spcAft>
+                <a:spcPts val="600"/>
+              </a:spcAft>
+              <a:buClr>
+                <a:schemeClr val="tx2"/>
+              </a:buClr>
+              <a:buSzPct val="70000"/>
+              <a:buFont typeface="Wingdings 2" charset="2"/>
+              <a:buChar char=""/>
+              <a:defRPr sz="1400" kern="1200">
+                <a:ln>
+                  <a:solidFill>
+                    <a:schemeClr val="bg1">
+                      <a:lumMod val="75000"/>
+                      <a:lumOff val="25000"/>
+                      <a:alpha val="10000"/>
+                    </a:schemeClr>
+                  </a:solidFill>
+                </a:ln>
+                <a:solidFill>
+                  <a:schemeClr val="tx2"/>
+                </a:solidFill>
+                <a:effectLst>
+                  <a:outerShdw blurRad="9525" dist="25400" dir="14640000" algn="tl" rotWithShape="0">
+                    <a:schemeClr val="bg1">
+                      <a:alpha val="30000"/>
+                    </a:schemeClr>
+                  </a:outerShdw>
+                </a:effectLst>
+                <a:latin typeface="+mn-lt"/>
+                <a:ea typeface="+mn-ea"/>
+                <a:cs typeface="+mn-cs"/>
+              </a:defRPr>
+            </a:lvl5pPr>
+            <a:lvl6pPr marL="2014600" indent="-228600" algn="l" defTabSz="457200" rtl="0" eaLnBrk="1" latinLnBrk="0" hangingPunct="1">
+              <a:spcBef>
+                <a:spcPct val="20000"/>
+              </a:spcBef>
+              <a:spcAft>
+                <a:spcPts val="600"/>
+              </a:spcAft>
+              <a:buClr>
+                <a:schemeClr val="tx2"/>
+              </a:buClr>
+              <a:buSzPct val="70000"/>
+              <a:buFont typeface="Wingdings 2" charset="2"/>
+              <a:buChar char=""/>
+              <a:defRPr sz="1400" kern="1200">
+                <a:ln>
+                  <a:solidFill>
+                    <a:schemeClr val="bg1">
+                      <a:lumMod val="75000"/>
+                      <a:lumOff val="25000"/>
+                      <a:alpha val="10000"/>
+                    </a:schemeClr>
+                  </a:solidFill>
+                </a:ln>
+                <a:solidFill>
+                  <a:schemeClr val="tx2"/>
+                </a:solidFill>
+                <a:effectLst>
+                  <a:outerShdw blurRad="9525" dist="25400" dir="14640000" algn="tl" rotWithShape="0">
+                    <a:schemeClr val="bg1">
+                      <a:alpha val="30000"/>
+                    </a:schemeClr>
+                  </a:outerShdw>
+                </a:effectLst>
+                <a:latin typeface="+mn-lt"/>
+                <a:ea typeface="+mn-ea"/>
+                <a:cs typeface="+mn-cs"/>
+              </a:defRPr>
+            </a:lvl6pPr>
+            <a:lvl7pPr marL="2401800" indent="-228600" algn="l" defTabSz="457200" rtl="0" eaLnBrk="1" latinLnBrk="0" hangingPunct="1">
+              <a:spcBef>
+                <a:spcPct val="20000"/>
+              </a:spcBef>
+              <a:spcAft>
+                <a:spcPts val="600"/>
+              </a:spcAft>
+              <a:buClr>
+                <a:schemeClr val="tx2"/>
+              </a:buClr>
+              <a:buSzPct val="70000"/>
+              <a:buFont typeface="Wingdings 2" charset="2"/>
+              <a:buChar char=""/>
+              <a:defRPr sz="1400" kern="1200">
+                <a:ln>
+                  <a:solidFill>
+                    <a:schemeClr val="bg1">
+                      <a:lumMod val="75000"/>
+                      <a:lumOff val="25000"/>
+                      <a:alpha val="10000"/>
+                    </a:schemeClr>
+                  </a:solidFill>
+                </a:ln>
+                <a:solidFill>
+                  <a:schemeClr val="tx2"/>
+                </a:solidFill>
+                <a:effectLst>
+                  <a:outerShdw blurRad="9525" dist="25400" dir="14640000" algn="tl" rotWithShape="0">
+                    <a:schemeClr val="bg1">
+                      <a:alpha val="30000"/>
+                    </a:schemeClr>
+                  </a:outerShdw>
+                </a:effectLst>
+                <a:latin typeface="+mn-lt"/>
+                <a:ea typeface="+mn-ea"/>
+                <a:cs typeface="+mn-cs"/>
+              </a:defRPr>
+            </a:lvl7pPr>
+            <a:lvl8pPr marL="2789000" indent="-228600" algn="l" defTabSz="457200" rtl="0" eaLnBrk="1" latinLnBrk="0" hangingPunct="1">
+              <a:spcBef>
+                <a:spcPct val="20000"/>
+              </a:spcBef>
+              <a:spcAft>
+                <a:spcPts val="600"/>
+              </a:spcAft>
+              <a:buClr>
+                <a:schemeClr val="tx2"/>
+              </a:buClr>
+              <a:buSzPct val="70000"/>
+              <a:buFont typeface="Wingdings 2" charset="2"/>
+              <a:buChar char=""/>
+              <a:defRPr sz="1400" kern="1200">
+                <a:ln>
+                  <a:solidFill>
+                    <a:schemeClr val="bg1">
+                      <a:lumMod val="75000"/>
+                      <a:lumOff val="25000"/>
+                      <a:alpha val="10000"/>
+                    </a:schemeClr>
+                  </a:solidFill>
+                </a:ln>
+                <a:solidFill>
+                  <a:schemeClr val="tx2"/>
+                </a:solidFill>
+                <a:effectLst>
+                  <a:outerShdw blurRad="9525" dist="25400" dir="14640000" algn="tl" rotWithShape="0">
+                    <a:schemeClr val="bg1">
+                      <a:alpha val="30000"/>
+                    </a:schemeClr>
+                  </a:outerShdw>
+                </a:effectLst>
+                <a:latin typeface="+mn-lt"/>
+                <a:ea typeface="+mn-ea"/>
+                <a:cs typeface="+mn-cs"/>
+              </a:defRPr>
+            </a:lvl8pPr>
+            <a:lvl9pPr marL="3106200" indent="-228600" algn="l" defTabSz="457200" rtl="0" eaLnBrk="1" latinLnBrk="0" hangingPunct="1">
+              <a:spcBef>
+                <a:spcPct val="20000"/>
+              </a:spcBef>
+              <a:spcAft>
+                <a:spcPts val="600"/>
+              </a:spcAft>
+              <a:buClr>
+                <a:schemeClr val="tx2"/>
+              </a:buClr>
+              <a:buSzPct val="70000"/>
+              <a:buFont typeface="Wingdings 2" charset="2"/>
+              <a:buChar char=""/>
+              <a:defRPr sz="1400" kern="1200">
+                <a:ln>
+                  <a:solidFill>
+                    <a:schemeClr val="bg1">
+                      <a:lumMod val="75000"/>
+                      <a:lumOff val="25000"/>
+                      <a:alpha val="10000"/>
+                    </a:schemeClr>
+                  </a:solidFill>
+                </a:ln>
+                <a:solidFill>
+                  <a:schemeClr val="tx2"/>
+                </a:solidFill>
+                <a:effectLst>
+                  <a:outerShdw blurRad="9525" dist="25400" dir="14640000" algn="tl" rotWithShape="0">
+                    <a:schemeClr val="bg1">
+                      <a:alpha val="30000"/>
+                    </a:schemeClr>
+                  </a:outerShdw>
+                </a:effectLst>
+                <a:latin typeface="+mn-lt"/>
+                <a:ea typeface="+mn-ea"/>
+                <a:cs typeface="+mn-cs"/>
+              </a:defRPr>
+            </a:lvl9pPr>
+          </a:lstStyle>
+          <a:p>
+            <a:r>
+              <a:rPr lang="en-US" dirty="0"/>
+              <a:t>Use short-lived access-tokens </a:t>
+            </a:r>
+          </a:p>
+          <a:p>
+            <a:r>
+              <a:rPr lang="en-US" dirty="0"/>
+              <a:t>Use refresh-tokens for long-lived sessions</a:t>
+            </a:r>
+          </a:p>
+          <a:p>
+            <a:r>
+              <a:rPr lang="en-US" dirty="0"/>
+              <a:t>Adopt tooling that allows you to revoke and/or rotate tokens (blacklists, token version, etc.)</a:t>
+            </a:r>
+          </a:p>
+          <a:p>
+            <a:r>
+              <a:rPr lang="en-US" dirty="0"/>
+              <a:t>Store secrets safely and effectively</a:t>
+            </a:r>
+          </a:p>
+          <a:p>
+            <a:pPr lvl="1"/>
+            <a:r>
+              <a:rPr lang="en-US" dirty="0"/>
+              <a:t>Use ENV vars</a:t>
+            </a:r>
+          </a:p>
+          <a:p>
+            <a:pPr lvl="1"/>
+            <a:r>
+              <a:rPr lang="en-US" dirty="0"/>
+              <a:t>Secret stores (e.g., Thycotic, AWS Secret Manager)</a:t>
+            </a:r>
+          </a:p>
+          <a:p>
+            <a:r>
+              <a:rPr lang="en-US" dirty="0"/>
+              <a:t>Key management</a:t>
+            </a:r>
+          </a:p>
+          <a:p>
+            <a:pPr lvl="1"/>
+            <a:r>
+              <a:rPr lang="en-US" dirty="0"/>
+              <a:t>Rotate signing keys</a:t>
+            </a:r>
+          </a:p>
+          <a:p>
+            <a:pPr lvl="1"/>
+            <a:r>
+              <a:rPr lang="en-US" dirty="0"/>
+              <a:t>Asymmetric signing (public/private keys)</a:t>
+            </a:r>
+          </a:p>
+        </p:txBody>
+      </p:sp>
+    </p:spTree>
+    <p:extLst>
+      <p:ext uri="{BB962C8B-B14F-4D97-AF65-F5344CB8AC3E}">
+        <p14:creationId xmlns:p14="http://schemas.microsoft.com/office/powerpoint/2010/main" val="3723166035"/>
+      </p:ext>
+    </p:extLst>
+  </p:cSld>
+  <p:clrMapOvr>
+    <a:masterClrMapping/>
+  </p:clrMapOvr>
+</p:sld>
+</file>
+
+<file path=ppt/slides/slide21.xml><?xml version="1.0" encoding="utf-8"?>
+<p:sld xmlns:a="http://schemas.openxmlformats.org/drawingml/2006/main" xmlns:r="http://schemas.openxmlformats.org/officeDocument/2006/relationships" xmlns:p="http://schemas.openxmlformats.org/presentationml/2006/main">
+  <p:cSld>
+    <p:spTree>
+      <p:nvGrpSpPr>
+        <p:cNvPr id="1" name="">
+          <a:extLst>
+            <a:ext uri="{FF2B5EF4-FFF2-40B4-BE49-F238E27FC236}">
               <a16:creationId xmlns:a16="http://schemas.microsoft.com/office/drawing/2014/main" id="{48776516-01D2-9BFB-DBA6-868A39E6AADA}"/>
             </a:ext>
           </a:extLst>
@@ -10797,7 +10906,7 @@
 </p:sld>
 </file>
 
-<file path=ppt/slides/slide21.xml><?xml version="1.0" encoding="utf-8"?>
+<file path=ppt/slides/slide22.xml><?xml version="1.0" encoding="utf-8"?>
 <p:sld xmlns:a="http://schemas.openxmlformats.org/drawingml/2006/main" xmlns:r="http://schemas.openxmlformats.org/officeDocument/2006/relationships" xmlns:p="http://schemas.openxmlformats.org/presentationml/2006/main">
   <p:cSld>
     <p:spTree>
@@ -11821,7 +11930,7 @@
 </p:sld>
 </file>
 
-<file path=ppt/slides/slide22.xml><?xml version="1.0" encoding="utf-8"?>
+<file path=ppt/slides/slide23.xml><?xml version="1.0" encoding="utf-8"?>
 <p:sld xmlns:a="http://schemas.openxmlformats.org/drawingml/2006/main" xmlns:r="http://schemas.openxmlformats.org/officeDocument/2006/relationships" xmlns:p="http://schemas.openxmlformats.org/presentationml/2006/main">
   <p:cSld>
     <p:spTree>
@@ -12360,7 +12469,7 @@
 </p:sld>
 </file>
 
-<file path=ppt/slides/slide23.xml><?xml version="1.0" encoding="utf-8"?>
+<file path=ppt/slides/slide24.xml><?xml version="1.0" encoding="utf-8"?>
 <p:sld xmlns:a="http://schemas.openxmlformats.org/drawingml/2006/main" xmlns:r="http://schemas.openxmlformats.org/officeDocument/2006/relationships" xmlns:p="http://schemas.openxmlformats.org/presentationml/2006/main">
   <p:cSld>
     <p:spTree>
@@ -13277,7 +13386,7 @@
 </p:sld>
 </file>
 
-<file path=ppt/slides/slide24.xml><?xml version="1.0" encoding="utf-8"?>
+<file path=ppt/slides/slide25.xml><?xml version="1.0" encoding="utf-8"?>
 <p:sld xmlns:a="http://schemas.openxmlformats.org/drawingml/2006/main" xmlns:r="http://schemas.openxmlformats.org/officeDocument/2006/relationships" xmlns:p="http://schemas.openxmlformats.org/presentationml/2006/main">
   <p:cSld>
     <p:spTree>
@@ -13376,7 +13485,7 @@
 </p:sld>
 </file>
 
-<file path=ppt/slides/slide25.xml><?xml version="1.0" encoding="utf-8"?>
+<file path=ppt/slides/slide26.xml><?xml version="1.0" encoding="utf-8"?>
 <p:sld xmlns:a="http://schemas.openxmlformats.org/drawingml/2006/main" xmlns:r="http://schemas.openxmlformats.org/officeDocument/2006/relationships" xmlns:p="http://schemas.openxmlformats.org/presentationml/2006/main">
   <p:cSld>
     <p:spTree>
@@ -13605,7 +13714,7 @@
 </p:sld>
 </file>
 
-<file path=ppt/slides/slide26.xml><?xml version="1.0" encoding="utf-8"?>
+<file path=ppt/slides/slide27.xml><?xml version="1.0" encoding="utf-8"?>
 <p:sld xmlns:a="http://schemas.openxmlformats.org/drawingml/2006/main" xmlns:r="http://schemas.openxmlformats.org/officeDocument/2006/relationships" xmlns:p="http://schemas.openxmlformats.org/presentationml/2006/main">
   <p:cSld>
     <p:spTree>
@@ -13751,7 +13860,161 @@
 </p:sld>
 </file>
 
-<file path=ppt/slides/slide27.xml><?xml version="1.0" encoding="utf-8"?>
+<file path=ppt/slides/slide28.xml><?xml version="1.0" encoding="utf-8"?>
+<p:sld xmlns:a="http://schemas.openxmlformats.org/drawingml/2006/main" xmlns:r="http://schemas.openxmlformats.org/officeDocument/2006/relationships" xmlns:p="http://schemas.openxmlformats.org/presentationml/2006/main">
+  <p:cSld>
+    <p:spTree>
+      <p:nvGrpSpPr>
+        <p:cNvPr id="1" name="">
+          <a:extLst>
+            <a:ext uri="{FF2B5EF4-FFF2-40B4-BE49-F238E27FC236}">
+              <a16:creationId xmlns:a16="http://schemas.microsoft.com/office/drawing/2014/main" id="{66A96AE6-BEDA-FB3E-419A-0A0E94A4D57F}"/>
+            </a:ext>
+          </a:extLst>
+        </p:cNvPr>
+        <p:cNvGrpSpPr/>
+        <p:nvPr/>
+      </p:nvGrpSpPr>
+      <p:grpSpPr>
+        <a:xfrm>
+          <a:off x="0" y="0"/>
+          <a:ext cx="0" cy="0"/>
+          <a:chOff x="0" y="0"/>
+          <a:chExt cx="0" cy="0"/>
+        </a:xfrm>
+      </p:grpSpPr>
+      <p:sp>
+        <p:nvSpPr>
+          <p:cNvPr id="2" name="Title 1">
+            <a:extLst>
+              <a:ext uri="{FF2B5EF4-FFF2-40B4-BE49-F238E27FC236}">
+                <a16:creationId xmlns:a16="http://schemas.microsoft.com/office/drawing/2014/main" id="{9ECA795E-7373-CA8C-0BDB-293D11A79B0C}"/>
+              </a:ext>
+            </a:extLst>
+          </p:cNvPr>
+          <p:cNvSpPr>
+            <a:spLocks noGrp="1"/>
+          </p:cNvSpPr>
+          <p:nvPr>
+            <p:ph type="title"/>
+          </p:nvPr>
+        </p:nvSpPr>
+        <p:spPr>
+          <a:xfrm>
+            <a:off x="913795" y="609600"/>
+            <a:ext cx="5978072" cy="970450"/>
+          </a:xfrm>
+        </p:spPr>
+        <p:txBody>
+          <a:bodyPr>
+            <a:normAutofit/>
+          </a:bodyPr>
+          <a:lstStyle/>
+          <a:p>
+            <a:pPr>
+              <a:lnSpc>
+                <a:spcPct val="90000"/>
+              </a:lnSpc>
+            </a:pPr>
+            <a:r>
+              <a:rPr lang="en-US" sz="3400" dirty="0"/>
+              <a:t>Inspect the Code | Iteration 1</a:t>
+            </a:r>
+          </a:p>
+        </p:txBody>
+      </p:sp>
+      <p:sp>
+        <p:nvSpPr>
+          <p:cNvPr id="13" name="Content Placeholder 12">
+            <a:extLst>
+              <a:ext uri="{FF2B5EF4-FFF2-40B4-BE49-F238E27FC236}">
+                <a16:creationId xmlns:a16="http://schemas.microsoft.com/office/drawing/2014/main" id="{DBC147F1-A2F1-C1F5-467A-DF5CC6C64FD8}"/>
+              </a:ext>
+            </a:extLst>
+          </p:cNvPr>
+          <p:cNvSpPr>
+            <a:spLocks noGrp="1"/>
+          </p:cNvSpPr>
+          <p:nvPr>
+            <p:ph idx="1"/>
+          </p:nvPr>
+        </p:nvSpPr>
+        <p:spPr>
+          <a:xfrm>
+            <a:off x="913795" y="1828801"/>
+            <a:ext cx="5978072" cy="3866048"/>
+          </a:xfrm>
+        </p:spPr>
+        <p:txBody>
+          <a:bodyPr anchor="ctr">
+            <a:normAutofit/>
+          </a:bodyPr>
+          <a:lstStyle/>
+          <a:p>
+            <a:r>
+              <a:rPr lang="en-US" dirty="0"/>
+              <a:t>Demo Time!</a:t>
+            </a:r>
+          </a:p>
+          <a:p>
+            <a:r>
+              <a:rPr lang="en-US" dirty="0"/>
+              <a:t>Let’s give it a spin!</a:t>
+            </a:r>
+          </a:p>
+        </p:txBody>
+      </p:sp>
+      <p:pic>
+        <p:nvPicPr>
+          <p:cNvPr id="9" name="Content Placeholder 8" descr="Doctors discussing test results">
+            <a:extLst>
+              <a:ext uri="{FF2B5EF4-FFF2-40B4-BE49-F238E27FC236}">
+                <a16:creationId xmlns:a16="http://schemas.microsoft.com/office/drawing/2014/main" id="{B15E5410-E955-0D6F-C8EF-D7FCFDE7F813}"/>
+              </a:ext>
+            </a:extLst>
+          </p:cNvPr>
+          <p:cNvPicPr>
+            <a:picLocks noChangeAspect="1"/>
+          </p:cNvPicPr>
+          <p:nvPr/>
+        </p:nvPicPr>
+        <p:blipFill>
+          <a:blip r:embed="rId2">
+            <a:extLst>
+              <a:ext uri="{28A0092B-C50C-407E-A947-70E740481C1C}">
+                <a14:useLocalDpi xmlns:a14="http://schemas.microsoft.com/office/drawing/2010/main" val="0"/>
+              </a:ext>
+            </a:extLst>
+          </a:blip>
+          <a:srcRect l="39984" r="7756" b="1"/>
+          <a:stretch>
+            <a:fillRect/>
+          </a:stretch>
+        </p:blipFill>
+        <p:spPr>
+          <a:xfrm>
+            <a:off x="7552945" y="643465"/>
+            <a:ext cx="3995592" cy="5103372"/>
+          </a:xfrm>
+          <a:prstGeom prst="rect">
+            <a:avLst/>
+          </a:prstGeom>
+        </p:spPr>
+      </p:pic>
+    </p:spTree>
+    <p:extLst>
+      <p:ext uri="{BB962C8B-B14F-4D97-AF65-F5344CB8AC3E}">
+        <p14:creationId xmlns:p14="http://schemas.microsoft.com/office/powerpoint/2010/main" val="487313142"/>
+      </p:ext>
+    </p:extLst>
+  </p:cSld>
+  <p:clrMapOvr>
+    <a:masterClrMapping/>
+  </p:clrMapOvr>
+</p:sld>
+</file>
+
+<file path=ppt/slides/slide29.xml><?xml version="1.0" encoding="utf-8"?>
 <p:sld xmlns:a="http://schemas.openxmlformats.org/drawingml/2006/main" xmlns:r="http://schemas.openxmlformats.org/officeDocument/2006/relationships" xmlns:p="http://schemas.openxmlformats.org/presentationml/2006/main">
   <p:cSld>
     <p:spTree>
@@ -13937,7 +14200,769 @@
 </p:sld>
 </file>
 
-<file path=ppt/slides/slide28.xml><?xml version="1.0" encoding="utf-8"?>
+<file path=ppt/slides/slide3.xml><?xml version="1.0" encoding="utf-8"?>
+<p:sld xmlns:a="http://schemas.openxmlformats.org/drawingml/2006/main" xmlns:r="http://schemas.openxmlformats.org/officeDocument/2006/relationships" xmlns:p="http://schemas.openxmlformats.org/presentationml/2006/main">
+  <p:cSld>
+    <p:spTree>
+      <p:nvGrpSpPr>
+        <p:cNvPr id="1" name="">
+          <a:extLst>
+            <a:ext uri="{FF2B5EF4-FFF2-40B4-BE49-F238E27FC236}">
+              <a16:creationId xmlns:a16="http://schemas.microsoft.com/office/drawing/2014/main" id="{7FC1815D-36C6-DEBE-F293-37C7520FEA2D}"/>
+            </a:ext>
+          </a:extLst>
+        </p:cNvPr>
+        <p:cNvGrpSpPr/>
+        <p:nvPr/>
+      </p:nvGrpSpPr>
+      <p:grpSpPr>
+        <a:xfrm>
+          <a:off x="0" y="0"/>
+          <a:ext cx="0" cy="0"/>
+          <a:chOff x="0" y="0"/>
+          <a:chExt cx="0" cy="0"/>
+        </a:xfrm>
+      </p:grpSpPr>
+      <p:sp>
+        <p:nvSpPr>
+          <p:cNvPr id="2" name="Title 1">
+            <a:extLst>
+              <a:ext uri="{FF2B5EF4-FFF2-40B4-BE49-F238E27FC236}">
+                <a16:creationId xmlns:a16="http://schemas.microsoft.com/office/drawing/2014/main" id="{7D6B405A-4B6E-66FF-DD0D-ACDC5B1476C1}"/>
+              </a:ext>
+            </a:extLst>
+          </p:cNvPr>
+          <p:cNvSpPr>
+            <a:spLocks noGrp="1"/>
+          </p:cNvSpPr>
+          <p:nvPr>
+            <p:ph type="title"/>
+          </p:nvPr>
+        </p:nvSpPr>
+        <p:spPr/>
+        <p:txBody>
+          <a:bodyPr/>
+          <a:lstStyle/>
+          <a:p>
+            <a:r>
+              <a:rPr lang="en-US" dirty="0"/>
+              <a:t>Recap |  REST API Design</a:t>
+            </a:r>
+          </a:p>
+        </p:txBody>
+      </p:sp>
+      <p:sp>
+        <p:nvSpPr>
+          <p:cNvPr id="3" name="Content Placeholder 2">
+            <a:extLst>
+              <a:ext uri="{FF2B5EF4-FFF2-40B4-BE49-F238E27FC236}">
+                <a16:creationId xmlns:a16="http://schemas.microsoft.com/office/drawing/2014/main" id="{10EE9929-B94D-4B32-DA27-A1881E8D68DD}"/>
+              </a:ext>
+            </a:extLst>
+          </p:cNvPr>
+          <p:cNvSpPr>
+            <a:spLocks noGrp="1"/>
+          </p:cNvSpPr>
+          <p:nvPr>
+            <p:ph idx="1"/>
+          </p:nvPr>
+        </p:nvSpPr>
+        <p:spPr>
+          <a:xfrm>
+            <a:off x="913795" y="1732449"/>
+            <a:ext cx="4426301" cy="4515951"/>
+          </a:xfrm>
+        </p:spPr>
+        <p:txBody>
+          <a:bodyPr>
+            <a:normAutofit fontScale="92500" lnSpcReduction="10000"/>
+          </a:bodyPr>
+          <a:lstStyle/>
+          <a:p>
+            <a:r>
+              <a:rPr lang="en-US" dirty="0"/>
+              <a:t>Resource-Centric Thinking</a:t>
+            </a:r>
+          </a:p>
+          <a:p>
+            <a:pPr lvl="1"/>
+            <a:r>
+              <a:rPr lang="en-US" dirty="0"/>
+              <a:t>Start naming resources (nouns) </a:t>
+            </a:r>
+          </a:p>
+          <a:p>
+            <a:r>
+              <a:rPr lang="en-US" dirty="0"/>
+              <a:t>Map actions to </a:t>
+            </a:r>
+            <a:r>
+              <a:rPr lang="en-US" dirty="0">
+                <a:solidFill>
+                  <a:srgbClr val="FFC000"/>
+                </a:solidFill>
+              </a:rPr>
+              <a:t>HTTP</a:t>
+            </a:r>
+            <a:r>
+              <a:rPr lang="en-US" dirty="0"/>
+              <a:t> Verbs</a:t>
+            </a:r>
+          </a:p>
+          <a:p>
+            <a:pPr lvl="1"/>
+            <a:r>
+              <a:rPr lang="en-US" dirty="0">
+                <a:solidFill>
+                  <a:srgbClr val="00B050"/>
+                </a:solidFill>
+              </a:rPr>
+              <a:t>GET</a:t>
+            </a:r>
+            <a:r>
+              <a:rPr lang="en-US" dirty="0"/>
+              <a:t> – Retrieve a resource</a:t>
+            </a:r>
+          </a:p>
+          <a:p>
+            <a:pPr lvl="1"/>
+            <a:r>
+              <a:rPr lang="en-US" dirty="0">
+                <a:solidFill>
+                  <a:srgbClr val="00B0F0"/>
+                </a:solidFill>
+              </a:rPr>
+              <a:t>POST</a:t>
+            </a:r>
+            <a:r>
+              <a:rPr lang="en-US" dirty="0"/>
+              <a:t> – Create a resource</a:t>
+            </a:r>
+          </a:p>
+          <a:p>
+            <a:pPr lvl="1"/>
+            <a:r>
+              <a:rPr lang="en-US" dirty="0">
+                <a:solidFill>
+                  <a:srgbClr val="FFC000"/>
+                </a:solidFill>
+              </a:rPr>
+              <a:t>PUT</a:t>
+            </a:r>
+            <a:r>
+              <a:rPr lang="en-US" dirty="0"/>
+              <a:t> – Replace a whole resource</a:t>
+            </a:r>
+          </a:p>
+          <a:p>
+            <a:pPr lvl="1"/>
+            <a:r>
+              <a:rPr lang="en-US" dirty="0">
+                <a:solidFill>
+                  <a:srgbClr val="FFC000"/>
+                </a:solidFill>
+              </a:rPr>
+              <a:t>PATCH</a:t>
+            </a:r>
+            <a:r>
+              <a:rPr lang="en-US" dirty="0"/>
+              <a:t> – Partially update a resource</a:t>
+            </a:r>
+          </a:p>
+          <a:p>
+            <a:pPr lvl="1"/>
+            <a:r>
+              <a:rPr lang="en-US" dirty="0">
+                <a:solidFill>
+                  <a:srgbClr val="FF0000"/>
+                </a:solidFill>
+              </a:rPr>
+              <a:t>DELETE</a:t>
+            </a:r>
+            <a:r>
+              <a:rPr lang="en-US" dirty="0"/>
+              <a:t> – Remove a resource</a:t>
+            </a:r>
+          </a:p>
+          <a:p>
+            <a:r>
+              <a:rPr lang="en-US" dirty="0"/>
+              <a:t>Less common</a:t>
+            </a:r>
+          </a:p>
+          <a:p>
+            <a:pPr lvl="1"/>
+            <a:r>
+              <a:rPr lang="en-US" dirty="0">
+                <a:solidFill>
+                  <a:schemeClr val="accent3"/>
+                </a:solidFill>
+              </a:rPr>
+              <a:t>HEAD</a:t>
+            </a:r>
+            <a:r>
+              <a:rPr lang="en-US" dirty="0"/>
+              <a:t> – Retrieves headers only</a:t>
+            </a:r>
+          </a:p>
+          <a:p>
+            <a:pPr lvl="1"/>
+            <a:r>
+              <a:rPr lang="en-US" dirty="0">
+                <a:solidFill>
+                  <a:schemeClr val="accent3"/>
+                </a:solidFill>
+              </a:rPr>
+              <a:t>OPTIONS</a:t>
+            </a:r>
+            <a:r>
+              <a:rPr lang="en-US" dirty="0"/>
+              <a:t> – Discovery methods/metadata</a:t>
+            </a:r>
+          </a:p>
+          <a:p>
+            <a:pPr lvl="2"/>
+            <a:endParaRPr lang="en-US" dirty="0"/>
+          </a:p>
+        </p:txBody>
+      </p:sp>
+      <p:sp>
+        <p:nvSpPr>
+          <p:cNvPr id="4" name="Content Placeholder 2">
+            <a:extLst>
+              <a:ext uri="{FF2B5EF4-FFF2-40B4-BE49-F238E27FC236}">
+                <a16:creationId xmlns:a16="http://schemas.microsoft.com/office/drawing/2014/main" id="{4DC5A275-4BB4-3F3F-8753-9592B57DF693}"/>
+              </a:ext>
+            </a:extLst>
+          </p:cNvPr>
+          <p:cNvSpPr txBox="1">
+            <a:spLocks/>
+          </p:cNvSpPr>
+          <p:nvPr/>
+        </p:nvSpPr>
+        <p:spPr>
+          <a:xfrm>
+            <a:off x="5464459" y="1732449"/>
+            <a:ext cx="6047837" cy="4515951"/>
+          </a:xfrm>
+          <a:prstGeom prst="rect">
+            <a:avLst/>
+          </a:prstGeom>
+          <a:effectLst>
+            <a:outerShdw blurRad="25400" dir="17880000">
+              <a:srgbClr val="000000">
+                <a:alpha val="46000"/>
+              </a:srgbClr>
+            </a:outerShdw>
+          </a:effectLst>
+        </p:spPr>
+        <p:txBody>
+          <a:bodyPr vert="horz" lIns="91440" tIns="45720" rIns="91440" bIns="45720" rtlCol="0" anchor="t">
+            <a:normAutofit fontScale="85000" lnSpcReduction="20000"/>
+          </a:bodyPr>
+          <a:lstStyle>
+            <a:lvl1pPr marL="342900" indent="-306000" algn="l" defTabSz="457200" rtl="0" eaLnBrk="1" latinLnBrk="0" hangingPunct="1">
+              <a:spcBef>
+                <a:spcPct val="20000"/>
+              </a:spcBef>
+              <a:spcAft>
+                <a:spcPts val="600"/>
+              </a:spcAft>
+              <a:buClr>
+                <a:schemeClr val="tx2"/>
+              </a:buClr>
+              <a:buSzPct val="70000"/>
+              <a:buFont typeface="Wingdings 2" charset="2"/>
+              <a:buChar char=""/>
+              <a:defRPr sz="2000" kern="1200">
+                <a:ln>
+                  <a:solidFill>
+                    <a:schemeClr val="bg1">
+                      <a:lumMod val="75000"/>
+                      <a:lumOff val="25000"/>
+                      <a:alpha val="10000"/>
+                    </a:schemeClr>
+                  </a:solidFill>
+                </a:ln>
+                <a:solidFill>
+                  <a:schemeClr val="tx2"/>
+                </a:solidFill>
+                <a:effectLst>
+                  <a:outerShdw blurRad="9525" dist="25400" dir="14640000" algn="tl" rotWithShape="0">
+                    <a:schemeClr val="bg1">
+                      <a:alpha val="30000"/>
+                    </a:schemeClr>
+                  </a:outerShdw>
+                </a:effectLst>
+                <a:latin typeface="+mn-lt"/>
+                <a:ea typeface="+mn-ea"/>
+                <a:cs typeface="+mn-cs"/>
+              </a:defRPr>
+            </a:lvl1pPr>
+            <a:lvl2pPr marL="720000" indent="-270000" algn="l" defTabSz="457200" rtl="0" eaLnBrk="1" latinLnBrk="0" hangingPunct="1">
+              <a:spcBef>
+                <a:spcPct val="20000"/>
+              </a:spcBef>
+              <a:spcAft>
+                <a:spcPts val="600"/>
+              </a:spcAft>
+              <a:buClr>
+                <a:schemeClr val="tx2"/>
+              </a:buClr>
+              <a:buSzPct val="70000"/>
+              <a:buFont typeface="Wingdings 2" charset="2"/>
+              <a:buChar char=""/>
+              <a:defRPr sz="1800" kern="1200">
+                <a:ln>
+                  <a:solidFill>
+                    <a:schemeClr val="bg1">
+                      <a:lumMod val="75000"/>
+                      <a:lumOff val="25000"/>
+                      <a:alpha val="10000"/>
+                    </a:schemeClr>
+                  </a:solidFill>
+                </a:ln>
+                <a:solidFill>
+                  <a:schemeClr val="tx2"/>
+                </a:solidFill>
+                <a:effectLst>
+                  <a:outerShdw blurRad="9525" dist="25400" dir="14640000" algn="tl" rotWithShape="0">
+                    <a:schemeClr val="bg1">
+                      <a:alpha val="30000"/>
+                    </a:schemeClr>
+                  </a:outerShdw>
+                </a:effectLst>
+                <a:latin typeface="+mn-lt"/>
+                <a:ea typeface="+mn-ea"/>
+                <a:cs typeface="+mn-cs"/>
+              </a:defRPr>
+            </a:lvl2pPr>
+            <a:lvl3pPr marL="1026000" indent="-216000" algn="l" defTabSz="457200" rtl="0" eaLnBrk="1" latinLnBrk="0" hangingPunct="1">
+              <a:spcBef>
+                <a:spcPct val="20000"/>
+              </a:spcBef>
+              <a:spcAft>
+                <a:spcPts val="600"/>
+              </a:spcAft>
+              <a:buClr>
+                <a:schemeClr val="tx2"/>
+              </a:buClr>
+              <a:buSzPct val="70000"/>
+              <a:buFont typeface="Wingdings 2" charset="2"/>
+              <a:buChar char=""/>
+              <a:defRPr sz="1600" kern="1200">
+                <a:ln>
+                  <a:solidFill>
+                    <a:schemeClr val="bg1">
+                      <a:lumMod val="75000"/>
+                      <a:lumOff val="25000"/>
+                      <a:alpha val="10000"/>
+                    </a:schemeClr>
+                  </a:solidFill>
+                </a:ln>
+                <a:solidFill>
+                  <a:schemeClr val="tx2"/>
+                </a:solidFill>
+                <a:effectLst>
+                  <a:outerShdw blurRad="9525" dist="25400" dir="14640000" algn="tl" rotWithShape="0">
+                    <a:schemeClr val="bg1">
+                      <a:alpha val="30000"/>
+                    </a:schemeClr>
+                  </a:outerShdw>
+                </a:effectLst>
+                <a:latin typeface="+mn-lt"/>
+                <a:ea typeface="+mn-ea"/>
+                <a:cs typeface="+mn-cs"/>
+              </a:defRPr>
+            </a:lvl3pPr>
+            <a:lvl4pPr marL="1386000" indent="-216000" algn="l" defTabSz="457200" rtl="0" eaLnBrk="1" latinLnBrk="0" hangingPunct="1">
+              <a:spcBef>
+                <a:spcPct val="20000"/>
+              </a:spcBef>
+              <a:spcAft>
+                <a:spcPts val="600"/>
+              </a:spcAft>
+              <a:buClr>
+                <a:schemeClr val="tx2"/>
+              </a:buClr>
+              <a:buSzPct val="70000"/>
+              <a:buFont typeface="Wingdings 2" charset="2"/>
+              <a:buChar char=""/>
+              <a:defRPr sz="1400" kern="1200">
+                <a:ln>
+                  <a:solidFill>
+                    <a:schemeClr val="bg1">
+                      <a:lumMod val="75000"/>
+                      <a:lumOff val="25000"/>
+                      <a:alpha val="10000"/>
+                    </a:schemeClr>
+                  </a:solidFill>
+                </a:ln>
+                <a:solidFill>
+                  <a:schemeClr val="tx2"/>
+                </a:solidFill>
+                <a:effectLst>
+                  <a:outerShdw blurRad="9525" dist="25400" dir="14640000" algn="tl" rotWithShape="0">
+                    <a:schemeClr val="bg1">
+                      <a:alpha val="30000"/>
+                    </a:schemeClr>
+                  </a:outerShdw>
+                </a:effectLst>
+                <a:latin typeface="+mn-lt"/>
+                <a:ea typeface="+mn-ea"/>
+                <a:cs typeface="+mn-cs"/>
+              </a:defRPr>
+            </a:lvl4pPr>
+            <a:lvl5pPr marL="1674000" indent="-216000" algn="l" defTabSz="457200" rtl="0" eaLnBrk="1" latinLnBrk="0" hangingPunct="1">
+              <a:spcBef>
+                <a:spcPct val="20000"/>
+              </a:spcBef>
+              <a:spcAft>
+                <a:spcPts val="600"/>
+              </a:spcAft>
+              <a:buClr>
+                <a:schemeClr val="tx2"/>
+              </a:buClr>
+              <a:buSzPct val="70000"/>
+              <a:buFont typeface="Wingdings 2" charset="2"/>
+              <a:buChar char=""/>
+              <a:defRPr sz="1400" kern="1200">
+                <a:ln>
+                  <a:solidFill>
+                    <a:schemeClr val="bg1">
+                      <a:lumMod val="75000"/>
+                      <a:lumOff val="25000"/>
+                      <a:alpha val="10000"/>
+                    </a:schemeClr>
+                  </a:solidFill>
+                </a:ln>
+                <a:solidFill>
+                  <a:schemeClr val="tx2"/>
+                </a:solidFill>
+                <a:effectLst>
+                  <a:outerShdw blurRad="9525" dist="25400" dir="14640000" algn="tl" rotWithShape="0">
+                    <a:schemeClr val="bg1">
+                      <a:alpha val="30000"/>
+                    </a:schemeClr>
+                  </a:outerShdw>
+                </a:effectLst>
+                <a:latin typeface="+mn-lt"/>
+                <a:ea typeface="+mn-ea"/>
+                <a:cs typeface="+mn-cs"/>
+              </a:defRPr>
+            </a:lvl5pPr>
+            <a:lvl6pPr marL="2014600" indent="-228600" algn="l" defTabSz="457200" rtl="0" eaLnBrk="1" latinLnBrk="0" hangingPunct="1">
+              <a:spcBef>
+                <a:spcPct val="20000"/>
+              </a:spcBef>
+              <a:spcAft>
+                <a:spcPts val="600"/>
+              </a:spcAft>
+              <a:buClr>
+                <a:schemeClr val="tx2"/>
+              </a:buClr>
+              <a:buSzPct val="70000"/>
+              <a:buFont typeface="Wingdings 2" charset="2"/>
+              <a:buChar char=""/>
+              <a:defRPr sz="1400" kern="1200">
+                <a:ln>
+                  <a:solidFill>
+                    <a:schemeClr val="bg1">
+                      <a:lumMod val="75000"/>
+                      <a:lumOff val="25000"/>
+                      <a:alpha val="10000"/>
+                    </a:schemeClr>
+                  </a:solidFill>
+                </a:ln>
+                <a:solidFill>
+                  <a:schemeClr val="tx2"/>
+                </a:solidFill>
+                <a:effectLst>
+                  <a:outerShdw blurRad="9525" dist="25400" dir="14640000" algn="tl" rotWithShape="0">
+                    <a:schemeClr val="bg1">
+                      <a:alpha val="30000"/>
+                    </a:schemeClr>
+                  </a:outerShdw>
+                </a:effectLst>
+                <a:latin typeface="+mn-lt"/>
+                <a:ea typeface="+mn-ea"/>
+                <a:cs typeface="+mn-cs"/>
+              </a:defRPr>
+            </a:lvl6pPr>
+            <a:lvl7pPr marL="2401800" indent="-228600" algn="l" defTabSz="457200" rtl="0" eaLnBrk="1" latinLnBrk="0" hangingPunct="1">
+              <a:spcBef>
+                <a:spcPct val="20000"/>
+              </a:spcBef>
+              <a:spcAft>
+                <a:spcPts val="600"/>
+              </a:spcAft>
+              <a:buClr>
+                <a:schemeClr val="tx2"/>
+              </a:buClr>
+              <a:buSzPct val="70000"/>
+              <a:buFont typeface="Wingdings 2" charset="2"/>
+              <a:buChar char=""/>
+              <a:defRPr sz="1400" kern="1200">
+                <a:ln>
+                  <a:solidFill>
+                    <a:schemeClr val="bg1">
+                      <a:lumMod val="75000"/>
+                      <a:lumOff val="25000"/>
+                      <a:alpha val="10000"/>
+                    </a:schemeClr>
+                  </a:solidFill>
+                </a:ln>
+                <a:solidFill>
+                  <a:schemeClr val="tx2"/>
+                </a:solidFill>
+                <a:effectLst>
+                  <a:outerShdw blurRad="9525" dist="25400" dir="14640000" algn="tl" rotWithShape="0">
+                    <a:schemeClr val="bg1">
+                      <a:alpha val="30000"/>
+                    </a:schemeClr>
+                  </a:outerShdw>
+                </a:effectLst>
+                <a:latin typeface="+mn-lt"/>
+                <a:ea typeface="+mn-ea"/>
+                <a:cs typeface="+mn-cs"/>
+              </a:defRPr>
+            </a:lvl7pPr>
+            <a:lvl8pPr marL="2789000" indent="-228600" algn="l" defTabSz="457200" rtl="0" eaLnBrk="1" latinLnBrk="0" hangingPunct="1">
+              <a:spcBef>
+                <a:spcPct val="20000"/>
+              </a:spcBef>
+              <a:spcAft>
+                <a:spcPts val="600"/>
+              </a:spcAft>
+              <a:buClr>
+                <a:schemeClr val="tx2"/>
+              </a:buClr>
+              <a:buSzPct val="70000"/>
+              <a:buFont typeface="Wingdings 2" charset="2"/>
+              <a:buChar char=""/>
+              <a:defRPr sz="1400" kern="1200">
+                <a:ln>
+                  <a:solidFill>
+                    <a:schemeClr val="bg1">
+                      <a:lumMod val="75000"/>
+                      <a:lumOff val="25000"/>
+                      <a:alpha val="10000"/>
+                    </a:schemeClr>
+                  </a:solidFill>
+                </a:ln>
+                <a:solidFill>
+                  <a:schemeClr val="tx2"/>
+                </a:solidFill>
+                <a:effectLst>
+                  <a:outerShdw blurRad="9525" dist="25400" dir="14640000" algn="tl" rotWithShape="0">
+                    <a:schemeClr val="bg1">
+                      <a:alpha val="30000"/>
+                    </a:schemeClr>
+                  </a:outerShdw>
+                </a:effectLst>
+                <a:latin typeface="+mn-lt"/>
+                <a:ea typeface="+mn-ea"/>
+                <a:cs typeface="+mn-cs"/>
+              </a:defRPr>
+            </a:lvl8pPr>
+            <a:lvl9pPr marL="3106200" indent="-228600" algn="l" defTabSz="457200" rtl="0" eaLnBrk="1" latinLnBrk="0" hangingPunct="1">
+              <a:spcBef>
+                <a:spcPct val="20000"/>
+              </a:spcBef>
+              <a:spcAft>
+                <a:spcPts val="600"/>
+              </a:spcAft>
+              <a:buClr>
+                <a:schemeClr val="tx2"/>
+              </a:buClr>
+              <a:buSzPct val="70000"/>
+              <a:buFont typeface="Wingdings 2" charset="2"/>
+              <a:buChar char=""/>
+              <a:defRPr sz="1400" kern="1200">
+                <a:ln>
+                  <a:solidFill>
+                    <a:schemeClr val="bg1">
+                      <a:lumMod val="75000"/>
+                      <a:lumOff val="25000"/>
+                      <a:alpha val="10000"/>
+                    </a:schemeClr>
+                  </a:solidFill>
+                </a:ln>
+                <a:solidFill>
+                  <a:schemeClr val="tx2"/>
+                </a:solidFill>
+                <a:effectLst>
+                  <a:outerShdw blurRad="9525" dist="25400" dir="14640000" algn="tl" rotWithShape="0">
+                    <a:schemeClr val="bg1">
+                      <a:alpha val="30000"/>
+                    </a:schemeClr>
+                  </a:outerShdw>
+                </a:effectLst>
+                <a:latin typeface="+mn-lt"/>
+                <a:ea typeface="+mn-ea"/>
+                <a:cs typeface="+mn-cs"/>
+              </a:defRPr>
+            </a:lvl9pPr>
+          </a:lstStyle>
+          <a:p>
+            <a:r>
+              <a:rPr lang="en-US" dirty="0"/>
+              <a:t>Map </a:t>
+            </a:r>
+            <a:r>
+              <a:rPr lang="en-US" dirty="0">
+                <a:solidFill>
+                  <a:srgbClr val="FFC000"/>
+                </a:solidFill>
+              </a:rPr>
+              <a:t>HTTP</a:t>
+            </a:r>
+            <a:r>
+              <a:rPr lang="en-US" dirty="0"/>
+              <a:t> Codes to API Operation Responses</a:t>
+            </a:r>
+          </a:p>
+          <a:p>
+            <a:r>
+              <a:rPr lang="en-US" b="1" dirty="0"/>
+              <a:t>RFC 9110 </a:t>
+            </a:r>
+            <a:r>
+              <a:rPr lang="en-US" dirty="0"/>
+              <a:t>| Part 15 – Specification definition for Status Codes</a:t>
+            </a:r>
+          </a:p>
+          <a:p>
+            <a:r>
+              <a:rPr lang="en-US" dirty="0">
+                <a:solidFill>
+                  <a:srgbClr val="FFC000"/>
+                </a:solidFill>
+              </a:rPr>
+              <a:t>1xx</a:t>
+            </a:r>
+            <a:r>
+              <a:rPr lang="en-US" dirty="0"/>
+              <a:t> | Informational</a:t>
+            </a:r>
+          </a:p>
+          <a:p>
+            <a:pPr lvl="1"/>
+            <a:r>
+              <a:rPr lang="en-US" dirty="0"/>
+              <a:t>The request was received, continuing processing</a:t>
+            </a:r>
+          </a:p>
+          <a:p>
+            <a:r>
+              <a:rPr lang="en-US" dirty="0">
+                <a:solidFill>
+                  <a:schemeClr val="accent1"/>
+                </a:solidFill>
+              </a:rPr>
+              <a:t>2xx</a:t>
+            </a:r>
+            <a:r>
+              <a:rPr lang="en-US" dirty="0"/>
+              <a:t> | Successful</a:t>
+            </a:r>
+          </a:p>
+          <a:p>
+            <a:pPr lvl="1"/>
+            <a:r>
+              <a:rPr lang="en-US" dirty="0"/>
+              <a:t>The request was successfully received, understood, and accepted</a:t>
+            </a:r>
+          </a:p>
+          <a:p>
+            <a:r>
+              <a:rPr lang="en-US" dirty="0">
+                <a:solidFill>
+                  <a:srgbClr val="00B0F0"/>
+                </a:solidFill>
+              </a:rPr>
+              <a:t>3xx</a:t>
+            </a:r>
+            <a:r>
+              <a:rPr lang="en-US" dirty="0"/>
+              <a:t> | Redirection</a:t>
+            </a:r>
+          </a:p>
+          <a:p>
+            <a:pPr lvl="1"/>
+            <a:r>
+              <a:rPr lang="en-US" dirty="0"/>
+              <a:t>Further action needs to be taken in order to complete the request</a:t>
+            </a:r>
+          </a:p>
+          <a:p>
+            <a:r>
+              <a:rPr lang="en-US" dirty="0">
+                <a:solidFill>
+                  <a:srgbClr val="C00000"/>
+                </a:solidFill>
+              </a:rPr>
+              <a:t>4xx</a:t>
+            </a:r>
+            <a:r>
+              <a:rPr lang="en-US" dirty="0"/>
+              <a:t> | Client Error</a:t>
+            </a:r>
+          </a:p>
+          <a:p>
+            <a:pPr lvl="1"/>
+            <a:r>
+              <a:rPr lang="en-US" dirty="0"/>
+              <a:t>The request contains bad syntax or cannot be fulfilled</a:t>
+            </a:r>
+          </a:p>
+          <a:p>
+            <a:r>
+              <a:rPr lang="en-US" dirty="0">
+                <a:solidFill>
+                  <a:srgbClr val="C00000"/>
+                </a:solidFill>
+              </a:rPr>
+              <a:t>5xx</a:t>
+            </a:r>
+            <a:r>
+              <a:rPr lang="en-US" dirty="0"/>
+              <a:t> | Server Error</a:t>
+            </a:r>
+          </a:p>
+          <a:p>
+            <a:pPr lvl="1"/>
+            <a:r>
+              <a:rPr lang="en-US" dirty="0"/>
+              <a:t>The server failed to fulfill an apparently valid request</a:t>
+            </a:r>
+          </a:p>
+          <a:p>
+            <a:pPr lvl="1"/>
+            <a:endParaRPr lang="en-US" sz="1000" dirty="0"/>
+          </a:p>
+          <a:p>
+            <a:pPr marL="450000" lvl="1" indent="0">
+              <a:buNone/>
+            </a:pPr>
+            <a:endParaRPr lang="en-US" dirty="0"/>
+          </a:p>
+        </p:txBody>
+      </p:sp>
+    </p:spTree>
+    <p:extLst>
+      <p:ext uri="{BB962C8B-B14F-4D97-AF65-F5344CB8AC3E}">
+        <p14:creationId xmlns:p14="http://schemas.microsoft.com/office/powerpoint/2010/main" val="2805199781"/>
+      </p:ext>
+    </p:extLst>
+  </p:cSld>
+  <p:clrMapOvr>
+    <a:masterClrMapping/>
+  </p:clrMapOvr>
+</p:sld>
+</file>
+
+<file path=ppt/slides/slide30.xml><?xml version="1.0" encoding="utf-8"?>
 <p:sld xmlns:a="http://schemas.openxmlformats.org/drawingml/2006/main" xmlns:r="http://schemas.openxmlformats.org/officeDocument/2006/relationships" xmlns:p="http://schemas.openxmlformats.org/presentationml/2006/main">
   <p:cSld>
     <p:spTree>
@@ -14093,7 +15118,161 @@
 </p:sld>
 </file>
 
-<file path=ppt/slides/slide29.xml><?xml version="1.0" encoding="utf-8"?>
+<file path=ppt/slides/slide31.xml><?xml version="1.0" encoding="utf-8"?>
+<p:sld xmlns:a="http://schemas.openxmlformats.org/drawingml/2006/main" xmlns:r="http://schemas.openxmlformats.org/officeDocument/2006/relationships" xmlns:p="http://schemas.openxmlformats.org/presentationml/2006/main">
+  <p:cSld>
+    <p:spTree>
+      <p:nvGrpSpPr>
+        <p:cNvPr id="1" name="">
+          <a:extLst>
+            <a:ext uri="{FF2B5EF4-FFF2-40B4-BE49-F238E27FC236}">
+              <a16:creationId xmlns:a16="http://schemas.microsoft.com/office/drawing/2014/main" id="{DCD2AB53-9A5A-2A52-664B-436FFFDE6D0C}"/>
+            </a:ext>
+          </a:extLst>
+        </p:cNvPr>
+        <p:cNvGrpSpPr/>
+        <p:nvPr/>
+      </p:nvGrpSpPr>
+      <p:grpSpPr>
+        <a:xfrm>
+          <a:off x="0" y="0"/>
+          <a:ext cx="0" cy="0"/>
+          <a:chOff x="0" y="0"/>
+          <a:chExt cx="0" cy="0"/>
+        </a:xfrm>
+      </p:grpSpPr>
+      <p:sp>
+        <p:nvSpPr>
+          <p:cNvPr id="2" name="Title 1">
+            <a:extLst>
+              <a:ext uri="{FF2B5EF4-FFF2-40B4-BE49-F238E27FC236}">
+                <a16:creationId xmlns:a16="http://schemas.microsoft.com/office/drawing/2014/main" id="{891BE33A-C861-D092-B3AE-8D957CB76CA1}"/>
+              </a:ext>
+            </a:extLst>
+          </p:cNvPr>
+          <p:cNvSpPr>
+            <a:spLocks noGrp="1"/>
+          </p:cNvSpPr>
+          <p:nvPr>
+            <p:ph type="title"/>
+          </p:nvPr>
+        </p:nvSpPr>
+        <p:spPr>
+          <a:xfrm>
+            <a:off x="913795" y="609600"/>
+            <a:ext cx="5978072" cy="970450"/>
+          </a:xfrm>
+        </p:spPr>
+        <p:txBody>
+          <a:bodyPr>
+            <a:normAutofit/>
+          </a:bodyPr>
+          <a:lstStyle/>
+          <a:p>
+            <a:pPr>
+              <a:lnSpc>
+                <a:spcPct val="90000"/>
+              </a:lnSpc>
+            </a:pPr>
+            <a:r>
+              <a:rPr lang="en-US" sz="3400" dirty="0"/>
+              <a:t>Inspect the Code | Iteration 2</a:t>
+            </a:r>
+          </a:p>
+        </p:txBody>
+      </p:sp>
+      <p:sp>
+        <p:nvSpPr>
+          <p:cNvPr id="13" name="Content Placeholder 12">
+            <a:extLst>
+              <a:ext uri="{FF2B5EF4-FFF2-40B4-BE49-F238E27FC236}">
+                <a16:creationId xmlns:a16="http://schemas.microsoft.com/office/drawing/2014/main" id="{12BC83F8-5048-A7CF-3367-3C0CBF1AC322}"/>
+              </a:ext>
+            </a:extLst>
+          </p:cNvPr>
+          <p:cNvSpPr>
+            <a:spLocks noGrp="1"/>
+          </p:cNvSpPr>
+          <p:nvPr>
+            <p:ph idx="1"/>
+          </p:nvPr>
+        </p:nvSpPr>
+        <p:spPr>
+          <a:xfrm>
+            <a:off x="913795" y="1828801"/>
+            <a:ext cx="5978072" cy="3866048"/>
+          </a:xfrm>
+        </p:spPr>
+        <p:txBody>
+          <a:bodyPr anchor="ctr">
+            <a:normAutofit/>
+          </a:bodyPr>
+          <a:lstStyle/>
+          <a:p>
+            <a:r>
+              <a:rPr lang="en-US" dirty="0"/>
+              <a:t>Demo Time!</a:t>
+            </a:r>
+          </a:p>
+          <a:p>
+            <a:r>
+              <a:rPr lang="en-US" dirty="0"/>
+              <a:t>Let’s give it a spin!</a:t>
+            </a:r>
+          </a:p>
+        </p:txBody>
+      </p:sp>
+      <p:pic>
+        <p:nvPicPr>
+          <p:cNvPr id="9" name="Content Placeholder 8" descr="Doctors discussing test results">
+            <a:extLst>
+              <a:ext uri="{FF2B5EF4-FFF2-40B4-BE49-F238E27FC236}">
+                <a16:creationId xmlns:a16="http://schemas.microsoft.com/office/drawing/2014/main" id="{694305EB-96E2-D355-307C-3E49D9637A0A}"/>
+              </a:ext>
+            </a:extLst>
+          </p:cNvPr>
+          <p:cNvPicPr>
+            <a:picLocks noChangeAspect="1"/>
+          </p:cNvPicPr>
+          <p:nvPr/>
+        </p:nvPicPr>
+        <p:blipFill>
+          <a:blip r:embed="rId2">
+            <a:extLst>
+              <a:ext uri="{28A0092B-C50C-407E-A947-70E740481C1C}">
+                <a14:useLocalDpi xmlns:a14="http://schemas.microsoft.com/office/drawing/2010/main" val="0"/>
+              </a:ext>
+            </a:extLst>
+          </a:blip>
+          <a:srcRect l="39984" r="7756" b="1"/>
+          <a:stretch>
+            <a:fillRect/>
+          </a:stretch>
+        </p:blipFill>
+        <p:spPr>
+          <a:xfrm>
+            <a:off x="7552945" y="643465"/>
+            <a:ext cx="3995592" cy="5103372"/>
+          </a:xfrm>
+          <a:prstGeom prst="rect">
+            <a:avLst/>
+          </a:prstGeom>
+        </p:spPr>
+      </p:pic>
+    </p:spTree>
+    <p:extLst>
+      <p:ext uri="{BB962C8B-B14F-4D97-AF65-F5344CB8AC3E}">
+        <p14:creationId xmlns:p14="http://schemas.microsoft.com/office/powerpoint/2010/main" val="3112294907"/>
+      </p:ext>
+    </p:extLst>
+  </p:cSld>
+  <p:clrMapOvr>
+    <a:masterClrMapping/>
+  </p:clrMapOvr>
+</p:sld>
+</file>
+
+<file path=ppt/slides/slide32.xml><?xml version="1.0" encoding="utf-8"?>
 <p:sld xmlns:a="http://schemas.openxmlformats.org/drawingml/2006/main" xmlns:r="http://schemas.openxmlformats.org/officeDocument/2006/relationships" xmlns:p="http://schemas.openxmlformats.org/presentationml/2006/main">
   <p:cSld>
     <p:bg>
@@ -14377,769 +15556,7 @@
 </p:sld>
 </file>
 
-<file path=ppt/slides/slide3.xml><?xml version="1.0" encoding="utf-8"?>
-<p:sld xmlns:a="http://schemas.openxmlformats.org/drawingml/2006/main" xmlns:r="http://schemas.openxmlformats.org/officeDocument/2006/relationships" xmlns:p="http://schemas.openxmlformats.org/presentationml/2006/main">
-  <p:cSld>
-    <p:spTree>
-      <p:nvGrpSpPr>
-        <p:cNvPr id="1" name="">
-          <a:extLst>
-            <a:ext uri="{FF2B5EF4-FFF2-40B4-BE49-F238E27FC236}">
-              <a16:creationId xmlns:a16="http://schemas.microsoft.com/office/drawing/2014/main" id="{7FC1815D-36C6-DEBE-F293-37C7520FEA2D}"/>
-            </a:ext>
-          </a:extLst>
-        </p:cNvPr>
-        <p:cNvGrpSpPr/>
-        <p:nvPr/>
-      </p:nvGrpSpPr>
-      <p:grpSpPr>
-        <a:xfrm>
-          <a:off x="0" y="0"/>
-          <a:ext cx="0" cy="0"/>
-          <a:chOff x="0" y="0"/>
-          <a:chExt cx="0" cy="0"/>
-        </a:xfrm>
-      </p:grpSpPr>
-      <p:sp>
-        <p:nvSpPr>
-          <p:cNvPr id="2" name="Title 1">
-            <a:extLst>
-              <a:ext uri="{FF2B5EF4-FFF2-40B4-BE49-F238E27FC236}">
-                <a16:creationId xmlns:a16="http://schemas.microsoft.com/office/drawing/2014/main" id="{7D6B405A-4B6E-66FF-DD0D-ACDC5B1476C1}"/>
-              </a:ext>
-            </a:extLst>
-          </p:cNvPr>
-          <p:cNvSpPr>
-            <a:spLocks noGrp="1"/>
-          </p:cNvSpPr>
-          <p:nvPr>
-            <p:ph type="title"/>
-          </p:nvPr>
-        </p:nvSpPr>
-        <p:spPr/>
-        <p:txBody>
-          <a:bodyPr/>
-          <a:lstStyle/>
-          <a:p>
-            <a:r>
-              <a:rPr lang="en-US" dirty="0"/>
-              <a:t>Recap |  REST API Design</a:t>
-            </a:r>
-          </a:p>
-        </p:txBody>
-      </p:sp>
-      <p:sp>
-        <p:nvSpPr>
-          <p:cNvPr id="3" name="Content Placeholder 2">
-            <a:extLst>
-              <a:ext uri="{FF2B5EF4-FFF2-40B4-BE49-F238E27FC236}">
-                <a16:creationId xmlns:a16="http://schemas.microsoft.com/office/drawing/2014/main" id="{10EE9929-B94D-4B32-DA27-A1881E8D68DD}"/>
-              </a:ext>
-            </a:extLst>
-          </p:cNvPr>
-          <p:cNvSpPr>
-            <a:spLocks noGrp="1"/>
-          </p:cNvSpPr>
-          <p:nvPr>
-            <p:ph idx="1"/>
-          </p:nvPr>
-        </p:nvSpPr>
-        <p:spPr>
-          <a:xfrm>
-            <a:off x="913795" y="1732449"/>
-            <a:ext cx="4426301" cy="4515951"/>
-          </a:xfrm>
-        </p:spPr>
-        <p:txBody>
-          <a:bodyPr>
-            <a:normAutofit fontScale="92500" lnSpcReduction="10000"/>
-          </a:bodyPr>
-          <a:lstStyle/>
-          <a:p>
-            <a:r>
-              <a:rPr lang="en-US" dirty="0"/>
-              <a:t>Resource-Centric Thinking</a:t>
-            </a:r>
-          </a:p>
-          <a:p>
-            <a:pPr lvl="1"/>
-            <a:r>
-              <a:rPr lang="en-US" dirty="0"/>
-              <a:t>Start naming resources (nouns) </a:t>
-            </a:r>
-          </a:p>
-          <a:p>
-            <a:r>
-              <a:rPr lang="en-US" dirty="0"/>
-              <a:t>Map actions to </a:t>
-            </a:r>
-            <a:r>
-              <a:rPr lang="en-US" dirty="0">
-                <a:solidFill>
-                  <a:srgbClr val="FFC000"/>
-                </a:solidFill>
-              </a:rPr>
-              <a:t>HTTP</a:t>
-            </a:r>
-            <a:r>
-              <a:rPr lang="en-US" dirty="0"/>
-              <a:t> Verbs</a:t>
-            </a:r>
-          </a:p>
-          <a:p>
-            <a:pPr lvl="1"/>
-            <a:r>
-              <a:rPr lang="en-US" dirty="0">
-                <a:solidFill>
-                  <a:srgbClr val="00B050"/>
-                </a:solidFill>
-              </a:rPr>
-              <a:t>GET</a:t>
-            </a:r>
-            <a:r>
-              <a:rPr lang="en-US" dirty="0"/>
-              <a:t> – Retrieve a resource</a:t>
-            </a:r>
-          </a:p>
-          <a:p>
-            <a:pPr lvl="1"/>
-            <a:r>
-              <a:rPr lang="en-US" dirty="0">
-                <a:solidFill>
-                  <a:srgbClr val="00B0F0"/>
-                </a:solidFill>
-              </a:rPr>
-              <a:t>POST</a:t>
-            </a:r>
-            <a:r>
-              <a:rPr lang="en-US" dirty="0"/>
-              <a:t> – Create a resource</a:t>
-            </a:r>
-          </a:p>
-          <a:p>
-            <a:pPr lvl="1"/>
-            <a:r>
-              <a:rPr lang="en-US" dirty="0">
-                <a:solidFill>
-                  <a:srgbClr val="FFC000"/>
-                </a:solidFill>
-              </a:rPr>
-              <a:t>PUT</a:t>
-            </a:r>
-            <a:r>
-              <a:rPr lang="en-US" dirty="0"/>
-              <a:t> – Replace a whole resource</a:t>
-            </a:r>
-          </a:p>
-          <a:p>
-            <a:pPr lvl="1"/>
-            <a:r>
-              <a:rPr lang="en-US" dirty="0">
-                <a:solidFill>
-                  <a:srgbClr val="FFC000"/>
-                </a:solidFill>
-              </a:rPr>
-              <a:t>PATCH</a:t>
-            </a:r>
-            <a:r>
-              <a:rPr lang="en-US" dirty="0"/>
-              <a:t> – Partially update a resource</a:t>
-            </a:r>
-          </a:p>
-          <a:p>
-            <a:pPr lvl="1"/>
-            <a:r>
-              <a:rPr lang="en-US" dirty="0">
-                <a:solidFill>
-                  <a:srgbClr val="FF0000"/>
-                </a:solidFill>
-              </a:rPr>
-              <a:t>DELETE</a:t>
-            </a:r>
-            <a:r>
-              <a:rPr lang="en-US" dirty="0"/>
-              <a:t> – Remove a resource</a:t>
-            </a:r>
-          </a:p>
-          <a:p>
-            <a:r>
-              <a:rPr lang="en-US" dirty="0"/>
-              <a:t>Less common</a:t>
-            </a:r>
-          </a:p>
-          <a:p>
-            <a:pPr lvl="1"/>
-            <a:r>
-              <a:rPr lang="en-US" dirty="0">
-                <a:solidFill>
-                  <a:schemeClr val="accent3"/>
-                </a:solidFill>
-              </a:rPr>
-              <a:t>HEAD</a:t>
-            </a:r>
-            <a:r>
-              <a:rPr lang="en-US" dirty="0"/>
-              <a:t> – Retrieves headers only</a:t>
-            </a:r>
-          </a:p>
-          <a:p>
-            <a:pPr lvl="1"/>
-            <a:r>
-              <a:rPr lang="en-US" dirty="0">
-                <a:solidFill>
-                  <a:schemeClr val="accent3"/>
-                </a:solidFill>
-              </a:rPr>
-              <a:t>OPTIONS</a:t>
-            </a:r>
-            <a:r>
-              <a:rPr lang="en-US" dirty="0"/>
-              <a:t> – Discovery methods/metadata</a:t>
-            </a:r>
-          </a:p>
-          <a:p>
-            <a:pPr lvl="2"/>
-            <a:endParaRPr lang="en-US" dirty="0"/>
-          </a:p>
-        </p:txBody>
-      </p:sp>
-      <p:sp>
-        <p:nvSpPr>
-          <p:cNvPr id="4" name="Content Placeholder 2">
-            <a:extLst>
-              <a:ext uri="{FF2B5EF4-FFF2-40B4-BE49-F238E27FC236}">
-                <a16:creationId xmlns:a16="http://schemas.microsoft.com/office/drawing/2014/main" id="{4DC5A275-4BB4-3F3F-8753-9592B57DF693}"/>
-              </a:ext>
-            </a:extLst>
-          </p:cNvPr>
-          <p:cNvSpPr txBox="1">
-            <a:spLocks/>
-          </p:cNvSpPr>
-          <p:nvPr/>
-        </p:nvSpPr>
-        <p:spPr>
-          <a:xfrm>
-            <a:off x="5464459" y="1732449"/>
-            <a:ext cx="6047837" cy="4515951"/>
-          </a:xfrm>
-          <a:prstGeom prst="rect">
-            <a:avLst/>
-          </a:prstGeom>
-          <a:effectLst>
-            <a:outerShdw blurRad="25400" dir="17880000">
-              <a:srgbClr val="000000">
-                <a:alpha val="46000"/>
-              </a:srgbClr>
-            </a:outerShdw>
-          </a:effectLst>
-        </p:spPr>
-        <p:txBody>
-          <a:bodyPr vert="horz" lIns="91440" tIns="45720" rIns="91440" bIns="45720" rtlCol="0" anchor="t">
-            <a:normAutofit fontScale="85000" lnSpcReduction="20000"/>
-          </a:bodyPr>
-          <a:lstStyle>
-            <a:lvl1pPr marL="342900" indent="-306000" algn="l" defTabSz="457200" rtl="0" eaLnBrk="1" latinLnBrk="0" hangingPunct="1">
-              <a:spcBef>
-                <a:spcPct val="20000"/>
-              </a:spcBef>
-              <a:spcAft>
-                <a:spcPts val="600"/>
-              </a:spcAft>
-              <a:buClr>
-                <a:schemeClr val="tx2"/>
-              </a:buClr>
-              <a:buSzPct val="70000"/>
-              <a:buFont typeface="Wingdings 2" charset="2"/>
-              <a:buChar char=""/>
-              <a:defRPr sz="2000" kern="1200">
-                <a:ln>
-                  <a:solidFill>
-                    <a:schemeClr val="bg1">
-                      <a:lumMod val="75000"/>
-                      <a:lumOff val="25000"/>
-                      <a:alpha val="10000"/>
-                    </a:schemeClr>
-                  </a:solidFill>
-                </a:ln>
-                <a:solidFill>
-                  <a:schemeClr val="tx2"/>
-                </a:solidFill>
-                <a:effectLst>
-                  <a:outerShdw blurRad="9525" dist="25400" dir="14640000" algn="tl" rotWithShape="0">
-                    <a:schemeClr val="bg1">
-                      <a:alpha val="30000"/>
-                    </a:schemeClr>
-                  </a:outerShdw>
-                </a:effectLst>
-                <a:latin typeface="+mn-lt"/>
-                <a:ea typeface="+mn-ea"/>
-                <a:cs typeface="+mn-cs"/>
-              </a:defRPr>
-            </a:lvl1pPr>
-            <a:lvl2pPr marL="720000" indent="-270000" algn="l" defTabSz="457200" rtl="0" eaLnBrk="1" latinLnBrk="0" hangingPunct="1">
-              <a:spcBef>
-                <a:spcPct val="20000"/>
-              </a:spcBef>
-              <a:spcAft>
-                <a:spcPts val="600"/>
-              </a:spcAft>
-              <a:buClr>
-                <a:schemeClr val="tx2"/>
-              </a:buClr>
-              <a:buSzPct val="70000"/>
-              <a:buFont typeface="Wingdings 2" charset="2"/>
-              <a:buChar char=""/>
-              <a:defRPr sz="1800" kern="1200">
-                <a:ln>
-                  <a:solidFill>
-                    <a:schemeClr val="bg1">
-                      <a:lumMod val="75000"/>
-                      <a:lumOff val="25000"/>
-                      <a:alpha val="10000"/>
-                    </a:schemeClr>
-                  </a:solidFill>
-                </a:ln>
-                <a:solidFill>
-                  <a:schemeClr val="tx2"/>
-                </a:solidFill>
-                <a:effectLst>
-                  <a:outerShdw blurRad="9525" dist="25400" dir="14640000" algn="tl" rotWithShape="0">
-                    <a:schemeClr val="bg1">
-                      <a:alpha val="30000"/>
-                    </a:schemeClr>
-                  </a:outerShdw>
-                </a:effectLst>
-                <a:latin typeface="+mn-lt"/>
-                <a:ea typeface="+mn-ea"/>
-                <a:cs typeface="+mn-cs"/>
-              </a:defRPr>
-            </a:lvl2pPr>
-            <a:lvl3pPr marL="1026000" indent="-216000" algn="l" defTabSz="457200" rtl="0" eaLnBrk="1" latinLnBrk="0" hangingPunct="1">
-              <a:spcBef>
-                <a:spcPct val="20000"/>
-              </a:spcBef>
-              <a:spcAft>
-                <a:spcPts val="600"/>
-              </a:spcAft>
-              <a:buClr>
-                <a:schemeClr val="tx2"/>
-              </a:buClr>
-              <a:buSzPct val="70000"/>
-              <a:buFont typeface="Wingdings 2" charset="2"/>
-              <a:buChar char=""/>
-              <a:defRPr sz="1600" kern="1200">
-                <a:ln>
-                  <a:solidFill>
-                    <a:schemeClr val="bg1">
-                      <a:lumMod val="75000"/>
-                      <a:lumOff val="25000"/>
-                      <a:alpha val="10000"/>
-                    </a:schemeClr>
-                  </a:solidFill>
-                </a:ln>
-                <a:solidFill>
-                  <a:schemeClr val="tx2"/>
-                </a:solidFill>
-                <a:effectLst>
-                  <a:outerShdw blurRad="9525" dist="25400" dir="14640000" algn="tl" rotWithShape="0">
-                    <a:schemeClr val="bg1">
-                      <a:alpha val="30000"/>
-                    </a:schemeClr>
-                  </a:outerShdw>
-                </a:effectLst>
-                <a:latin typeface="+mn-lt"/>
-                <a:ea typeface="+mn-ea"/>
-                <a:cs typeface="+mn-cs"/>
-              </a:defRPr>
-            </a:lvl3pPr>
-            <a:lvl4pPr marL="1386000" indent="-216000" algn="l" defTabSz="457200" rtl="0" eaLnBrk="1" latinLnBrk="0" hangingPunct="1">
-              <a:spcBef>
-                <a:spcPct val="20000"/>
-              </a:spcBef>
-              <a:spcAft>
-                <a:spcPts val="600"/>
-              </a:spcAft>
-              <a:buClr>
-                <a:schemeClr val="tx2"/>
-              </a:buClr>
-              <a:buSzPct val="70000"/>
-              <a:buFont typeface="Wingdings 2" charset="2"/>
-              <a:buChar char=""/>
-              <a:defRPr sz="1400" kern="1200">
-                <a:ln>
-                  <a:solidFill>
-                    <a:schemeClr val="bg1">
-                      <a:lumMod val="75000"/>
-                      <a:lumOff val="25000"/>
-                      <a:alpha val="10000"/>
-                    </a:schemeClr>
-                  </a:solidFill>
-                </a:ln>
-                <a:solidFill>
-                  <a:schemeClr val="tx2"/>
-                </a:solidFill>
-                <a:effectLst>
-                  <a:outerShdw blurRad="9525" dist="25400" dir="14640000" algn="tl" rotWithShape="0">
-                    <a:schemeClr val="bg1">
-                      <a:alpha val="30000"/>
-                    </a:schemeClr>
-                  </a:outerShdw>
-                </a:effectLst>
-                <a:latin typeface="+mn-lt"/>
-                <a:ea typeface="+mn-ea"/>
-                <a:cs typeface="+mn-cs"/>
-              </a:defRPr>
-            </a:lvl4pPr>
-            <a:lvl5pPr marL="1674000" indent="-216000" algn="l" defTabSz="457200" rtl="0" eaLnBrk="1" latinLnBrk="0" hangingPunct="1">
-              <a:spcBef>
-                <a:spcPct val="20000"/>
-              </a:spcBef>
-              <a:spcAft>
-                <a:spcPts val="600"/>
-              </a:spcAft>
-              <a:buClr>
-                <a:schemeClr val="tx2"/>
-              </a:buClr>
-              <a:buSzPct val="70000"/>
-              <a:buFont typeface="Wingdings 2" charset="2"/>
-              <a:buChar char=""/>
-              <a:defRPr sz="1400" kern="1200">
-                <a:ln>
-                  <a:solidFill>
-                    <a:schemeClr val="bg1">
-                      <a:lumMod val="75000"/>
-                      <a:lumOff val="25000"/>
-                      <a:alpha val="10000"/>
-                    </a:schemeClr>
-                  </a:solidFill>
-                </a:ln>
-                <a:solidFill>
-                  <a:schemeClr val="tx2"/>
-                </a:solidFill>
-                <a:effectLst>
-                  <a:outerShdw blurRad="9525" dist="25400" dir="14640000" algn="tl" rotWithShape="0">
-                    <a:schemeClr val="bg1">
-                      <a:alpha val="30000"/>
-                    </a:schemeClr>
-                  </a:outerShdw>
-                </a:effectLst>
-                <a:latin typeface="+mn-lt"/>
-                <a:ea typeface="+mn-ea"/>
-                <a:cs typeface="+mn-cs"/>
-              </a:defRPr>
-            </a:lvl5pPr>
-            <a:lvl6pPr marL="2014600" indent="-228600" algn="l" defTabSz="457200" rtl="0" eaLnBrk="1" latinLnBrk="0" hangingPunct="1">
-              <a:spcBef>
-                <a:spcPct val="20000"/>
-              </a:spcBef>
-              <a:spcAft>
-                <a:spcPts val="600"/>
-              </a:spcAft>
-              <a:buClr>
-                <a:schemeClr val="tx2"/>
-              </a:buClr>
-              <a:buSzPct val="70000"/>
-              <a:buFont typeface="Wingdings 2" charset="2"/>
-              <a:buChar char=""/>
-              <a:defRPr sz="1400" kern="1200">
-                <a:ln>
-                  <a:solidFill>
-                    <a:schemeClr val="bg1">
-                      <a:lumMod val="75000"/>
-                      <a:lumOff val="25000"/>
-                      <a:alpha val="10000"/>
-                    </a:schemeClr>
-                  </a:solidFill>
-                </a:ln>
-                <a:solidFill>
-                  <a:schemeClr val="tx2"/>
-                </a:solidFill>
-                <a:effectLst>
-                  <a:outerShdw blurRad="9525" dist="25400" dir="14640000" algn="tl" rotWithShape="0">
-                    <a:schemeClr val="bg1">
-                      <a:alpha val="30000"/>
-                    </a:schemeClr>
-                  </a:outerShdw>
-                </a:effectLst>
-                <a:latin typeface="+mn-lt"/>
-                <a:ea typeface="+mn-ea"/>
-                <a:cs typeface="+mn-cs"/>
-              </a:defRPr>
-            </a:lvl6pPr>
-            <a:lvl7pPr marL="2401800" indent="-228600" algn="l" defTabSz="457200" rtl="0" eaLnBrk="1" latinLnBrk="0" hangingPunct="1">
-              <a:spcBef>
-                <a:spcPct val="20000"/>
-              </a:spcBef>
-              <a:spcAft>
-                <a:spcPts val="600"/>
-              </a:spcAft>
-              <a:buClr>
-                <a:schemeClr val="tx2"/>
-              </a:buClr>
-              <a:buSzPct val="70000"/>
-              <a:buFont typeface="Wingdings 2" charset="2"/>
-              <a:buChar char=""/>
-              <a:defRPr sz="1400" kern="1200">
-                <a:ln>
-                  <a:solidFill>
-                    <a:schemeClr val="bg1">
-                      <a:lumMod val="75000"/>
-                      <a:lumOff val="25000"/>
-                      <a:alpha val="10000"/>
-                    </a:schemeClr>
-                  </a:solidFill>
-                </a:ln>
-                <a:solidFill>
-                  <a:schemeClr val="tx2"/>
-                </a:solidFill>
-                <a:effectLst>
-                  <a:outerShdw blurRad="9525" dist="25400" dir="14640000" algn="tl" rotWithShape="0">
-                    <a:schemeClr val="bg1">
-                      <a:alpha val="30000"/>
-                    </a:schemeClr>
-                  </a:outerShdw>
-                </a:effectLst>
-                <a:latin typeface="+mn-lt"/>
-                <a:ea typeface="+mn-ea"/>
-                <a:cs typeface="+mn-cs"/>
-              </a:defRPr>
-            </a:lvl7pPr>
-            <a:lvl8pPr marL="2789000" indent="-228600" algn="l" defTabSz="457200" rtl="0" eaLnBrk="1" latinLnBrk="0" hangingPunct="1">
-              <a:spcBef>
-                <a:spcPct val="20000"/>
-              </a:spcBef>
-              <a:spcAft>
-                <a:spcPts val="600"/>
-              </a:spcAft>
-              <a:buClr>
-                <a:schemeClr val="tx2"/>
-              </a:buClr>
-              <a:buSzPct val="70000"/>
-              <a:buFont typeface="Wingdings 2" charset="2"/>
-              <a:buChar char=""/>
-              <a:defRPr sz="1400" kern="1200">
-                <a:ln>
-                  <a:solidFill>
-                    <a:schemeClr val="bg1">
-                      <a:lumMod val="75000"/>
-                      <a:lumOff val="25000"/>
-                      <a:alpha val="10000"/>
-                    </a:schemeClr>
-                  </a:solidFill>
-                </a:ln>
-                <a:solidFill>
-                  <a:schemeClr val="tx2"/>
-                </a:solidFill>
-                <a:effectLst>
-                  <a:outerShdw blurRad="9525" dist="25400" dir="14640000" algn="tl" rotWithShape="0">
-                    <a:schemeClr val="bg1">
-                      <a:alpha val="30000"/>
-                    </a:schemeClr>
-                  </a:outerShdw>
-                </a:effectLst>
-                <a:latin typeface="+mn-lt"/>
-                <a:ea typeface="+mn-ea"/>
-                <a:cs typeface="+mn-cs"/>
-              </a:defRPr>
-            </a:lvl8pPr>
-            <a:lvl9pPr marL="3106200" indent="-228600" algn="l" defTabSz="457200" rtl="0" eaLnBrk="1" latinLnBrk="0" hangingPunct="1">
-              <a:spcBef>
-                <a:spcPct val="20000"/>
-              </a:spcBef>
-              <a:spcAft>
-                <a:spcPts val="600"/>
-              </a:spcAft>
-              <a:buClr>
-                <a:schemeClr val="tx2"/>
-              </a:buClr>
-              <a:buSzPct val="70000"/>
-              <a:buFont typeface="Wingdings 2" charset="2"/>
-              <a:buChar char=""/>
-              <a:defRPr sz="1400" kern="1200">
-                <a:ln>
-                  <a:solidFill>
-                    <a:schemeClr val="bg1">
-                      <a:lumMod val="75000"/>
-                      <a:lumOff val="25000"/>
-                      <a:alpha val="10000"/>
-                    </a:schemeClr>
-                  </a:solidFill>
-                </a:ln>
-                <a:solidFill>
-                  <a:schemeClr val="tx2"/>
-                </a:solidFill>
-                <a:effectLst>
-                  <a:outerShdw blurRad="9525" dist="25400" dir="14640000" algn="tl" rotWithShape="0">
-                    <a:schemeClr val="bg1">
-                      <a:alpha val="30000"/>
-                    </a:schemeClr>
-                  </a:outerShdw>
-                </a:effectLst>
-                <a:latin typeface="+mn-lt"/>
-                <a:ea typeface="+mn-ea"/>
-                <a:cs typeface="+mn-cs"/>
-              </a:defRPr>
-            </a:lvl9pPr>
-          </a:lstStyle>
-          <a:p>
-            <a:r>
-              <a:rPr lang="en-US" dirty="0"/>
-              <a:t>Map </a:t>
-            </a:r>
-            <a:r>
-              <a:rPr lang="en-US" dirty="0">
-                <a:solidFill>
-                  <a:srgbClr val="FFC000"/>
-                </a:solidFill>
-              </a:rPr>
-              <a:t>HTTP</a:t>
-            </a:r>
-            <a:r>
-              <a:rPr lang="en-US" dirty="0"/>
-              <a:t> Codes to API Operation Responses</a:t>
-            </a:r>
-          </a:p>
-          <a:p>
-            <a:r>
-              <a:rPr lang="en-US" b="1" dirty="0"/>
-              <a:t>RFC 9110 </a:t>
-            </a:r>
-            <a:r>
-              <a:rPr lang="en-US" dirty="0"/>
-              <a:t>| Part 15 – Specification definition for Status Codes</a:t>
-            </a:r>
-          </a:p>
-          <a:p>
-            <a:r>
-              <a:rPr lang="en-US" dirty="0">
-                <a:solidFill>
-                  <a:srgbClr val="FFC000"/>
-                </a:solidFill>
-              </a:rPr>
-              <a:t>1xx</a:t>
-            </a:r>
-            <a:r>
-              <a:rPr lang="en-US" dirty="0"/>
-              <a:t> | Informational</a:t>
-            </a:r>
-          </a:p>
-          <a:p>
-            <a:pPr lvl="1"/>
-            <a:r>
-              <a:rPr lang="en-US" dirty="0"/>
-              <a:t>The request was received, continuing processing</a:t>
-            </a:r>
-          </a:p>
-          <a:p>
-            <a:r>
-              <a:rPr lang="en-US" dirty="0">
-                <a:solidFill>
-                  <a:schemeClr val="accent1"/>
-                </a:solidFill>
-              </a:rPr>
-              <a:t>2xx</a:t>
-            </a:r>
-            <a:r>
-              <a:rPr lang="en-US" dirty="0"/>
-              <a:t> | Successful</a:t>
-            </a:r>
-          </a:p>
-          <a:p>
-            <a:pPr lvl="1"/>
-            <a:r>
-              <a:rPr lang="en-US" dirty="0"/>
-              <a:t>The request was successfully received, understood, and accepted</a:t>
-            </a:r>
-          </a:p>
-          <a:p>
-            <a:r>
-              <a:rPr lang="en-US" dirty="0">
-                <a:solidFill>
-                  <a:srgbClr val="00B0F0"/>
-                </a:solidFill>
-              </a:rPr>
-              <a:t>3xx</a:t>
-            </a:r>
-            <a:r>
-              <a:rPr lang="en-US" dirty="0"/>
-              <a:t> | Redirection</a:t>
-            </a:r>
-          </a:p>
-          <a:p>
-            <a:pPr lvl="1"/>
-            <a:r>
-              <a:rPr lang="en-US" dirty="0"/>
-              <a:t>Further action needs to be taken in order to complete the request</a:t>
-            </a:r>
-          </a:p>
-          <a:p>
-            <a:r>
-              <a:rPr lang="en-US" dirty="0">
-                <a:solidFill>
-                  <a:srgbClr val="C00000"/>
-                </a:solidFill>
-              </a:rPr>
-              <a:t>4xx</a:t>
-            </a:r>
-            <a:r>
-              <a:rPr lang="en-US" dirty="0"/>
-              <a:t> | Client Error</a:t>
-            </a:r>
-          </a:p>
-          <a:p>
-            <a:pPr lvl="1"/>
-            <a:r>
-              <a:rPr lang="en-US" dirty="0"/>
-              <a:t>The request contains bad syntax or cannot be fulfilled</a:t>
-            </a:r>
-          </a:p>
-          <a:p>
-            <a:r>
-              <a:rPr lang="en-US" dirty="0">
-                <a:solidFill>
-                  <a:srgbClr val="C00000"/>
-                </a:solidFill>
-              </a:rPr>
-              <a:t>5xx</a:t>
-            </a:r>
-            <a:r>
-              <a:rPr lang="en-US" dirty="0"/>
-              <a:t> | Server Error</a:t>
-            </a:r>
-          </a:p>
-          <a:p>
-            <a:pPr lvl="1"/>
-            <a:r>
-              <a:rPr lang="en-US" dirty="0"/>
-              <a:t>The server failed to fulfill an apparently valid request</a:t>
-            </a:r>
-          </a:p>
-          <a:p>
-            <a:pPr lvl="1"/>
-            <a:endParaRPr lang="en-US" sz="1000" dirty="0"/>
-          </a:p>
-          <a:p>
-            <a:pPr marL="450000" lvl="1" indent="0">
-              <a:buNone/>
-            </a:pPr>
-            <a:endParaRPr lang="en-US" dirty="0"/>
-          </a:p>
-        </p:txBody>
-      </p:sp>
-    </p:spTree>
-    <p:extLst>
-      <p:ext uri="{BB962C8B-B14F-4D97-AF65-F5344CB8AC3E}">
-        <p14:creationId xmlns:p14="http://schemas.microsoft.com/office/powerpoint/2010/main" val="2805199781"/>
-      </p:ext>
-    </p:extLst>
-  </p:cSld>
-  <p:clrMapOvr>
-    <a:masterClrMapping/>
-  </p:clrMapOvr>
-</p:sld>
-</file>
-
-<file path=ppt/slides/slide30.xml><?xml version="1.0" encoding="utf-8"?>
+<file path=ppt/slides/slide33.xml><?xml version="1.0" encoding="utf-8"?>
 <p:sld xmlns:a="http://schemas.openxmlformats.org/drawingml/2006/main" xmlns:r="http://schemas.openxmlformats.org/officeDocument/2006/relationships" xmlns:p="http://schemas.openxmlformats.org/presentationml/2006/main">
   <p:cSld>
     <p:spTree>
@@ -15359,7 +15776,7 @@
 </p:sld>
 </file>
 
-<file path=ppt/slides/slide31.xml><?xml version="1.0" encoding="utf-8"?>
+<file path=ppt/slides/slide34.xml><?xml version="1.0" encoding="utf-8"?>
 <p:sld xmlns:a="http://schemas.openxmlformats.org/drawingml/2006/main" xmlns:r="http://schemas.openxmlformats.org/officeDocument/2006/relationships" xmlns:p="http://schemas.openxmlformats.org/presentationml/2006/main">
   <p:cSld>
     <p:spTree>
@@ -15845,7 +16262,7 @@
 </p:sld>
 </file>
 
-<file path=ppt/slides/slide32.xml><?xml version="1.0" encoding="utf-8"?>
+<file path=ppt/slides/slide35.xml><?xml version="1.0" encoding="utf-8"?>
 <p:sld xmlns:a="http://schemas.openxmlformats.org/drawingml/2006/main" xmlns:r="http://schemas.openxmlformats.org/officeDocument/2006/relationships" xmlns:p="http://schemas.openxmlformats.org/presentationml/2006/main">
   <p:cSld>
     <p:spTree>
@@ -16070,7 +16487,7 @@
 </p:sld>
 </file>
 
-<file path=ppt/slides/slide33.xml><?xml version="1.0" encoding="utf-8"?>
+<file path=ppt/slides/slide36.xml><?xml version="1.0" encoding="utf-8"?>
 <p:sld xmlns:a="http://schemas.openxmlformats.org/drawingml/2006/main" xmlns:r="http://schemas.openxmlformats.org/officeDocument/2006/relationships" xmlns:p="http://schemas.openxmlformats.org/presentationml/2006/main">
   <p:cSld>
     <p:spTree>
@@ -16335,7 +16752,161 @@
 </p:sld>
 </file>
 
-<file path=ppt/slides/slide34.xml><?xml version="1.0" encoding="utf-8"?>
+<file path=ppt/slides/slide37.xml><?xml version="1.0" encoding="utf-8"?>
+<p:sld xmlns:a="http://schemas.openxmlformats.org/drawingml/2006/main" xmlns:r="http://schemas.openxmlformats.org/officeDocument/2006/relationships" xmlns:p="http://schemas.openxmlformats.org/presentationml/2006/main">
+  <p:cSld>
+    <p:spTree>
+      <p:nvGrpSpPr>
+        <p:cNvPr id="1" name="">
+          <a:extLst>
+            <a:ext uri="{FF2B5EF4-FFF2-40B4-BE49-F238E27FC236}">
+              <a16:creationId xmlns:a16="http://schemas.microsoft.com/office/drawing/2014/main" id="{CB271713-3332-C5B6-F289-BFFCA0A62176}"/>
+            </a:ext>
+          </a:extLst>
+        </p:cNvPr>
+        <p:cNvGrpSpPr/>
+        <p:nvPr/>
+      </p:nvGrpSpPr>
+      <p:grpSpPr>
+        <a:xfrm>
+          <a:off x="0" y="0"/>
+          <a:ext cx="0" cy="0"/>
+          <a:chOff x="0" y="0"/>
+          <a:chExt cx="0" cy="0"/>
+        </a:xfrm>
+      </p:grpSpPr>
+      <p:sp>
+        <p:nvSpPr>
+          <p:cNvPr id="2" name="Title 1">
+            <a:extLst>
+              <a:ext uri="{FF2B5EF4-FFF2-40B4-BE49-F238E27FC236}">
+                <a16:creationId xmlns:a16="http://schemas.microsoft.com/office/drawing/2014/main" id="{2F4A7CA5-8618-9059-E3B8-13B3298F83EF}"/>
+              </a:ext>
+            </a:extLst>
+          </p:cNvPr>
+          <p:cNvSpPr>
+            <a:spLocks noGrp="1"/>
+          </p:cNvSpPr>
+          <p:nvPr>
+            <p:ph type="title"/>
+          </p:nvPr>
+        </p:nvSpPr>
+        <p:spPr>
+          <a:xfrm>
+            <a:off x="913795" y="609600"/>
+            <a:ext cx="5978072" cy="970450"/>
+          </a:xfrm>
+        </p:spPr>
+        <p:txBody>
+          <a:bodyPr>
+            <a:normAutofit/>
+          </a:bodyPr>
+          <a:lstStyle/>
+          <a:p>
+            <a:pPr>
+              <a:lnSpc>
+                <a:spcPct val="90000"/>
+              </a:lnSpc>
+            </a:pPr>
+            <a:r>
+              <a:rPr lang="en-US" sz="3400" dirty="0"/>
+              <a:t>Inspect the Code | Iteration 3</a:t>
+            </a:r>
+          </a:p>
+        </p:txBody>
+      </p:sp>
+      <p:sp>
+        <p:nvSpPr>
+          <p:cNvPr id="13" name="Content Placeholder 12">
+            <a:extLst>
+              <a:ext uri="{FF2B5EF4-FFF2-40B4-BE49-F238E27FC236}">
+                <a16:creationId xmlns:a16="http://schemas.microsoft.com/office/drawing/2014/main" id="{BE62FC0E-7F38-A768-685D-B7B7FA3B1D15}"/>
+              </a:ext>
+            </a:extLst>
+          </p:cNvPr>
+          <p:cNvSpPr>
+            <a:spLocks noGrp="1"/>
+          </p:cNvSpPr>
+          <p:nvPr>
+            <p:ph idx="1"/>
+          </p:nvPr>
+        </p:nvSpPr>
+        <p:spPr>
+          <a:xfrm>
+            <a:off x="913795" y="1828801"/>
+            <a:ext cx="5978072" cy="3866048"/>
+          </a:xfrm>
+        </p:spPr>
+        <p:txBody>
+          <a:bodyPr anchor="ctr">
+            <a:normAutofit/>
+          </a:bodyPr>
+          <a:lstStyle/>
+          <a:p>
+            <a:r>
+              <a:rPr lang="en-US" dirty="0"/>
+              <a:t>Demo Time!</a:t>
+            </a:r>
+          </a:p>
+          <a:p>
+            <a:r>
+              <a:rPr lang="en-US" dirty="0"/>
+              <a:t>Let’s give it a spin!</a:t>
+            </a:r>
+          </a:p>
+        </p:txBody>
+      </p:sp>
+      <p:pic>
+        <p:nvPicPr>
+          <p:cNvPr id="9" name="Content Placeholder 8" descr="Doctors discussing test results">
+            <a:extLst>
+              <a:ext uri="{FF2B5EF4-FFF2-40B4-BE49-F238E27FC236}">
+                <a16:creationId xmlns:a16="http://schemas.microsoft.com/office/drawing/2014/main" id="{CBB572A6-9496-939B-B374-60E7CA7C712E}"/>
+              </a:ext>
+            </a:extLst>
+          </p:cNvPr>
+          <p:cNvPicPr>
+            <a:picLocks noChangeAspect="1"/>
+          </p:cNvPicPr>
+          <p:nvPr/>
+        </p:nvPicPr>
+        <p:blipFill>
+          <a:blip r:embed="rId2">
+            <a:extLst>
+              <a:ext uri="{28A0092B-C50C-407E-A947-70E740481C1C}">
+                <a14:useLocalDpi xmlns:a14="http://schemas.microsoft.com/office/drawing/2010/main" val="0"/>
+              </a:ext>
+            </a:extLst>
+          </a:blip>
+          <a:srcRect l="39984" r="7756" b="1"/>
+          <a:stretch>
+            <a:fillRect/>
+          </a:stretch>
+        </p:blipFill>
+        <p:spPr>
+          <a:xfrm>
+            <a:off x="7552945" y="643465"/>
+            <a:ext cx="3995592" cy="5103372"/>
+          </a:xfrm>
+          <a:prstGeom prst="rect">
+            <a:avLst/>
+          </a:prstGeom>
+        </p:spPr>
+      </p:pic>
+    </p:spTree>
+    <p:extLst>
+      <p:ext uri="{BB962C8B-B14F-4D97-AF65-F5344CB8AC3E}">
+        <p14:creationId xmlns:p14="http://schemas.microsoft.com/office/powerpoint/2010/main" val="2174150019"/>
+      </p:ext>
+    </p:extLst>
+  </p:cSld>
+  <p:clrMapOvr>
+    <a:masterClrMapping/>
+  </p:clrMapOvr>
+</p:sld>
+</file>
+
+<file path=ppt/slides/slide38.xml><?xml version="1.0" encoding="utf-8"?>
 <p:sld xmlns:a="http://schemas.openxmlformats.org/drawingml/2006/main" xmlns:r="http://schemas.openxmlformats.org/officeDocument/2006/relationships" xmlns:p="http://schemas.openxmlformats.org/presentationml/2006/main">
   <p:cSld>
     <p:bg>
@@ -16632,7 +17203,7 @@
 </p:sld>
 </file>
 
-<file path=ppt/slides/slide35.xml><?xml version="1.0" encoding="utf-8"?>
+<file path=ppt/slides/slide39.xml><?xml version="1.0" encoding="utf-8"?>
 <p:sld xmlns:a="http://schemas.openxmlformats.org/drawingml/2006/main" xmlns:r="http://schemas.openxmlformats.org/officeDocument/2006/relationships" xmlns:p="http://schemas.openxmlformats.org/presentationml/2006/main">
   <p:cSld>
     <p:spTree>
@@ -18050,7 +18621,198 @@
 </p:sld>
 </file>
 
-<file path=ppt/slides/slide36.xml><?xml version="1.0" encoding="utf-8"?>
+<file path=ppt/slides/slide4.xml><?xml version="1.0" encoding="utf-8"?>
+<p:sld xmlns:a="http://schemas.openxmlformats.org/drawingml/2006/main" xmlns:r="http://schemas.openxmlformats.org/officeDocument/2006/relationships" xmlns:p="http://schemas.openxmlformats.org/presentationml/2006/main">
+  <p:cSld>
+    <p:spTree>
+      <p:nvGrpSpPr>
+        <p:cNvPr id="1" name=""/>
+        <p:cNvGrpSpPr/>
+        <p:nvPr/>
+      </p:nvGrpSpPr>
+      <p:grpSpPr>
+        <a:xfrm>
+          <a:off x="0" y="0"/>
+          <a:ext cx="0" cy="0"/>
+          <a:chOff x="0" y="0"/>
+          <a:chExt cx="0" cy="0"/>
+        </a:xfrm>
+      </p:grpSpPr>
+      <p:sp>
+        <p:nvSpPr>
+          <p:cNvPr id="2" name="Title 1">
+            <a:extLst>
+              <a:ext uri="{FF2B5EF4-FFF2-40B4-BE49-F238E27FC236}">
+                <a16:creationId xmlns:a16="http://schemas.microsoft.com/office/drawing/2014/main" id="{650E3B46-876F-3C57-ECA8-4003DAE02AC8}"/>
+              </a:ext>
+            </a:extLst>
+          </p:cNvPr>
+          <p:cNvSpPr>
+            <a:spLocks noGrp="1"/>
+          </p:cNvSpPr>
+          <p:nvPr>
+            <p:ph type="title"/>
+          </p:nvPr>
+        </p:nvSpPr>
+        <p:spPr/>
+        <p:txBody>
+          <a:bodyPr/>
+          <a:lstStyle/>
+          <a:p>
+            <a:r>
+              <a:rPr lang="en-US" dirty="0"/>
+              <a:t>Pre-Flight Check</a:t>
+            </a:r>
+          </a:p>
+        </p:txBody>
+      </p:sp>
+      <p:sp>
+        <p:nvSpPr>
+          <p:cNvPr id="3" name="Content Placeholder 2">
+            <a:extLst>
+              <a:ext uri="{FF2B5EF4-FFF2-40B4-BE49-F238E27FC236}">
+                <a16:creationId xmlns:a16="http://schemas.microsoft.com/office/drawing/2014/main" id="{56CF61DF-D06B-AD92-3060-2B71136C44B3}"/>
+              </a:ext>
+            </a:extLst>
+          </p:cNvPr>
+          <p:cNvSpPr>
+            <a:spLocks noGrp="1"/>
+          </p:cNvSpPr>
+          <p:nvPr>
+            <p:ph idx="1"/>
+          </p:nvPr>
+        </p:nvSpPr>
+        <p:spPr>
+          <a:xfrm>
+            <a:off x="913795" y="1732449"/>
+            <a:ext cx="5935061" cy="4058751"/>
+          </a:xfrm>
+        </p:spPr>
+        <p:txBody>
+          <a:bodyPr>
+            <a:normAutofit fontScale="92500" lnSpcReduction="10000"/>
+          </a:bodyPr>
+          <a:lstStyle/>
+          <a:p>
+            <a:r>
+              <a:rPr lang="en-US" dirty="0"/>
+              <a:t>You have setup up a work environment</a:t>
+            </a:r>
+          </a:p>
+          <a:p>
+            <a:pPr lvl="1"/>
+            <a:r>
+              <a:rPr lang="en-US" dirty="0"/>
+              <a:t>Clone the </a:t>
+            </a:r>
+            <a:r>
+              <a:rPr lang="en-US" dirty="0" err="1">
+                <a:solidFill>
+                  <a:schemeClr val="accent1"/>
+                </a:solidFill>
+                <a:latin typeface="OCR A Extended" panose="02010509020102010303" pitchFamily="50" charset="0"/>
+              </a:rPr>
+              <a:t>api</a:t>
+            </a:r>
+            <a:r>
+              <a:rPr lang="en-US" dirty="0">
+                <a:solidFill>
+                  <a:schemeClr val="accent1"/>
+                </a:solidFill>
+                <a:latin typeface="OCR A Extended" panose="02010509020102010303" pitchFamily="50" charset="0"/>
+              </a:rPr>
+              <a:t>-workshop</a:t>
+            </a:r>
+            <a:r>
+              <a:rPr lang="en-US" dirty="0"/>
+              <a:t> mono-repo</a:t>
+            </a:r>
+          </a:p>
+          <a:p>
+            <a:pPr lvl="1"/>
+            <a:r>
+              <a:rPr lang="en-US" dirty="0"/>
+              <a:t>You can run the REST API under the directory </a:t>
+            </a:r>
+            <a:r>
+              <a:rPr lang="en-US" dirty="0">
+                <a:solidFill>
+                  <a:schemeClr val="accent1"/>
+                </a:solidFill>
+                <a:latin typeface="OCR A Extended" panose="02010509020102010303" pitchFamily="50" charset="0"/>
+              </a:rPr>
+              <a:t>library-</a:t>
+            </a:r>
+            <a:r>
+              <a:rPr lang="en-US" dirty="0" err="1">
+                <a:solidFill>
+                  <a:schemeClr val="accent1"/>
+                </a:solidFill>
+                <a:latin typeface="OCR A Extended" panose="02010509020102010303" pitchFamily="50" charset="0"/>
+              </a:rPr>
+              <a:t>api</a:t>
+            </a:r>
+            <a:r>
+              <a:rPr lang="en-US" dirty="0">
+                <a:solidFill>
+                  <a:schemeClr val="accent1"/>
+                </a:solidFill>
+                <a:latin typeface="OCR A Extended" panose="02010509020102010303" pitchFamily="50" charset="0"/>
+              </a:rPr>
+              <a:t>-basic</a:t>
+            </a:r>
+          </a:p>
+          <a:p>
+            <a:pPr lvl="1"/>
+            <a:r>
+              <a:rPr lang="en-US" dirty="0"/>
+              <a:t>Look at the README.md document for instructions</a:t>
+            </a:r>
+          </a:p>
+          <a:p>
+            <a:r>
+              <a:rPr lang="en-US" b="1" dirty="0">
+                <a:solidFill>
+                  <a:srgbClr val="FFC000"/>
+                </a:solidFill>
+              </a:rPr>
+              <a:t>Disclaimer:</a:t>
+            </a:r>
+            <a:r>
+              <a:rPr lang="en-US" dirty="0"/>
+              <a:t>  Most of my experience is building REST APIs using </a:t>
+            </a:r>
+            <a:r>
+              <a:rPr lang="en-US" dirty="0" err="1"/>
+              <a:t>c#</a:t>
+            </a:r>
+            <a:r>
+              <a:rPr lang="en-US" dirty="0"/>
+              <a:t> and the dotnet core platform for RESTful APIs.  If you are experienced in Python and could improve upon the code presented here, feel free to submit PRs to the repo so others can benefit too</a:t>
+            </a:r>
+          </a:p>
+          <a:p>
+            <a:r>
+              <a:rPr lang="en-US" dirty="0"/>
+              <a:t>We continue the story from here…</a:t>
+            </a:r>
+          </a:p>
+        </p:txBody>
+      </p:sp>
+    </p:spTree>
+    <p:extLst>
+      <p:ext uri="{BB962C8B-B14F-4D97-AF65-F5344CB8AC3E}">
+        <p14:creationId xmlns:p14="http://schemas.microsoft.com/office/powerpoint/2010/main" val="1814355794"/>
+      </p:ext>
+    </p:extLst>
+  </p:cSld>
+  <p:clrMapOvr>
+    <a:masterClrMapping/>
+  </p:clrMapOvr>
+</p:sld>
+</file>
+
+<file path=ppt/slides/slide40.xml><?xml version="1.0" encoding="utf-8"?>
 <p:sld xmlns:a="http://schemas.openxmlformats.org/drawingml/2006/main" xmlns:r="http://schemas.openxmlformats.org/officeDocument/2006/relationships" xmlns:p="http://schemas.openxmlformats.org/presentationml/2006/main">
   <p:cSld>
     <p:spTree>
@@ -18265,7 +19027,7 @@
 </p:sld>
 </file>
 
-<file path=ppt/slides/slide37.xml><?xml version="1.0" encoding="utf-8"?>
+<file path=ppt/slides/slide41.xml><?xml version="1.0" encoding="utf-8"?>
 <p:sld xmlns:a="http://schemas.openxmlformats.org/drawingml/2006/main" xmlns:r="http://schemas.openxmlformats.org/officeDocument/2006/relationships" xmlns:p="http://schemas.openxmlformats.org/presentationml/2006/main">
   <p:cSld>
     <p:bg>
@@ -18660,7 +19422,7 @@
 </p:sld>
 </file>
 
-<file path=ppt/slides/slide38.xml><?xml version="1.0" encoding="utf-8"?>
+<file path=ppt/slides/slide42.xml><?xml version="1.0" encoding="utf-8"?>
 <p:sld xmlns:a="http://schemas.openxmlformats.org/drawingml/2006/main" xmlns:r="http://schemas.openxmlformats.org/officeDocument/2006/relationships" xmlns:p="http://schemas.openxmlformats.org/presentationml/2006/main">
   <p:cSld>
     <p:spTree>
@@ -18794,7 +19556,7 @@
 </p:sld>
 </file>
 
-<file path=ppt/slides/slide39.xml><?xml version="1.0" encoding="utf-8"?>
+<file path=ppt/slides/slide43.xml><?xml version="1.0" encoding="utf-8"?>
 <p:sld xmlns:a="http://schemas.openxmlformats.org/drawingml/2006/main" xmlns:r="http://schemas.openxmlformats.org/officeDocument/2006/relationships" xmlns:p="http://schemas.openxmlformats.org/presentationml/2006/main">
   <p:cSld>
     <p:spTree>
@@ -19351,197 +20113,6 @@
     <p:extLst>
       <p:ext uri="{BB962C8B-B14F-4D97-AF65-F5344CB8AC3E}">
         <p14:creationId xmlns:p14="http://schemas.microsoft.com/office/powerpoint/2010/main" val="1796939782"/>
-      </p:ext>
-    </p:extLst>
-  </p:cSld>
-  <p:clrMapOvr>
-    <a:masterClrMapping/>
-  </p:clrMapOvr>
-</p:sld>
-</file>
-
-<file path=ppt/slides/slide4.xml><?xml version="1.0" encoding="utf-8"?>
-<p:sld xmlns:a="http://schemas.openxmlformats.org/drawingml/2006/main" xmlns:r="http://schemas.openxmlformats.org/officeDocument/2006/relationships" xmlns:p="http://schemas.openxmlformats.org/presentationml/2006/main">
-  <p:cSld>
-    <p:spTree>
-      <p:nvGrpSpPr>
-        <p:cNvPr id="1" name=""/>
-        <p:cNvGrpSpPr/>
-        <p:nvPr/>
-      </p:nvGrpSpPr>
-      <p:grpSpPr>
-        <a:xfrm>
-          <a:off x="0" y="0"/>
-          <a:ext cx="0" cy="0"/>
-          <a:chOff x="0" y="0"/>
-          <a:chExt cx="0" cy="0"/>
-        </a:xfrm>
-      </p:grpSpPr>
-      <p:sp>
-        <p:nvSpPr>
-          <p:cNvPr id="2" name="Title 1">
-            <a:extLst>
-              <a:ext uri="{FF2B5EF4-FFF2-40B4-BE49-F238E27FC236}">
-                <a16:creationId xmlns:a16="http://schemas.microsoft.com/office/drawing/2014/main" id="{650E3B46-876F-3C57-ECA8-4003DAE02AC8}"/>
-              </a:ext>
-            </a:extLst>
-          </p:cNvPr>
-          <p:cNvSpPr>
-            <a:spLocks noGrp="1"/>
-          </p:cNvSpPr>
-          <p:nvPr>
-            <p:ph type="title"/>
-          </p:nvPr>
-        </p:nvSpPr>
-        <p:spPr/>
-        <p:txBody>
-          <a:bodyPr/>
-          <a:lstStyle/>
-          <a:p>
-            <a:r>
-              <a:rPr lang="en-US" dirty="0"/>
-              <a:t>Pre-Flight Check</a:t>
-            </a:r>
-          </a:p>
-        </p:txBody>
-      </p:sp>
-      <p:sp>
-        <p:nvSpPr>
-          <p:cNvPr id="3" name="Content Placeholder 2">
-            <a:extLst>
-              <a:ext uri="{FF2B5EF4-FFF2-40B4-BE49-F238E27FC236}">
-                <a16:creationId xmlns:a16="http://schemas.microsoft.com/office/drawing/2014/main" id="{56CF61DF-D06B-AD92-3060-2B71136C44B3}"/>
-              </a:ext>
-            </a:extLst>
-          </p:cNvPr>
-          <p:cNvSpPr>
-            <a:spLocks noGrp="1"/>
-          </p:cNvSpPr>
-          <p:nvPr>
-            <p:ph idx="1"/>
-          </p:nvPr>
-        </p:nvSpPr>
-        <p:spPr>
-          <a:xfrm>
-            <a:off x="913795" y="1732449"/>
-            <a:ext cx="5935061" cy="4058751"/>
-          </a:xfrm>
-        </p:spPr>
-        <p:txBody>
-          <a:bodyPr>
-            <a:normAutofit fontScale="92500" lnSpcReduction="10000"/>
-          </a:bodyPr>
-          <a:lstStyle/>
-          <a:p>
-            <a:r>
-              <a:rPr lang="en-US" dirty="0"/>
-              <a:t>You have setup up a work environment</a:t>
-            </a:r>
-          </a:p>
-          <a:p>
-            <a:pPr lvl="1"/>
-            <a:r>
-              <a:rPr lang="en-US" dirty="0"/>
-              <a:t>Clone the </a:t>
-            </a:r>
-            <a:r>
-              <a:rPr lang="en-US" dirty="0" err="1">
-                <a:solidFill>
-                  <a:schemeClr val="accent1"/>
-                </a:solidFill>
-                <a:latin typeface="OCR A Extended" panose="02010509020102010303" pitchFamily="50" charset="0"/>
-              </a:rPr>
-              <a:t>api</a:t>
-            </a:r>
-            <a:r>
-              <a:rPr lang="en-US" dirty="0">
-                <a:solidFill>
-                  <a:schemeClr val="accent1"/>
-                </a:solidFill>
-                <a:latin typeface="OCR A Extended" panose="02010509020102010303" pitchFamily="50" charset="0"/>
-              </a:rPr>
-              <a:t>-workshop</a:t>
-            </a:r>
-            <a:r>
-              <a:rPr lang="en-US" dirty="0"/>
-              <a:t> mono-repo</a:t>
-            </a:r>
-          </a:p>
-          <a:p>
-            <a:pPr lvl="1"/>
-            <a:r>
-              <a:rPr lang="en-US" dirty="0"/>
-              <a:t>You can run the REST API under the directory </a:t>
-            </a:r>
-            <a:r>
-              <a:rPr lang="en-US" dirty="0">
-                <a:solidFill>
-                  <a:schemeClr val="accent1"/>
-                </a:solidFill>
-                <a:latin typeface="OCR A Extended" panose="02010509020102010303" pitchFamily="50" charset="0"/>
-              </a:rPr>
-              <a:t>library-</a:t>
-            </a:r>
-            <a:r>
-              <a:rPr lang="en-US" dirty="0" err="1">
-                <a:solidFill>
-                  <a:schemeClr val="accent1"/>
-                </a:solidFill>
-                <a:latin typeface="OCR A Extended" panose="02010509020102010303" pitchFamily="50" charset="0"/>
-              </a:rPr>
-              <a:t>api</a:t>
-            </a:r>
-            <a:r>
-              <a:rPr lang="en-US" dirty="0">
-                <a:solidFill>
-                  <a:schemeClr val="accent1"/>
-                </a:solidFill>
-                <a:latin typeface="OCR A Extended" panose="02010509020102010303" pitchFamily="50" charset="0"/>
-              </a:rPr>
-              <a:t>-basic</a:t>
-            </a:r>
-          </a:p>
-          <a:p>
-            <a:pPr lvl="1"/>
-            <a:r>
-              <a:rPr lang="en-US" dirty="0"/>
-              <a:t>Look at the README.md document for instructions</a:t>
-            </a:r>
-          </a:p>
-          <a:p>
-            <a:r>
-              <a:rPr lang="en-US" b="1" dirty="0">
-                <a:solidFill>
-                  <a:srgbClr val="FFC000"/>
-                </a:solidFill>
-              </a:rPr>
-              <a:t>Disclaimer:</a:t>
-            </a:r>
-            <a:r>
-              <a:rPr lang="en-US" dirty="0"/>
-              <a:t>  Most of my experience is building REST APIs using </a:t>
-            </a:r>
-            <a:r>
-              <a:rPr lang="en-US" dirty="0" err="1"/>
-              <a:t>c#</a:t>
-            </a:r>
-            <a:r>
-              <a:rPr lang="en-US" dirty="0"/>
-              <a:t> and the dotnet core platform for RESTful APIs.  If you are experienced in Python and could improve upon the code presented here, feel free to submit PRs to the repo so others can benefit too</a:t>
-            </a:r>
-          </a:p>
-          <a:p>
-            <a:r>
-              <a:rPr lang="en-US" dirty="0"/>
-              <a:t>We continue the story from here…</a:t>
-            </a:r>
-          </a:p>
-        </p:txBody>
-      </p:sp>
-    </p:spTree>
-    <p:extLst>
-      <p:ext uri="{BB962C8B-B14F-4D97-AF65-F5344CB8AC3E}">
-        <p14:creationId xmlns:p14="http://schemas.microsoft.com/office/powerpoint/2010/main" val="1814355794"/>
       </p:ext>
     </p:extLst>
   </p:cSld>
@@ -19658,6 +20229,562 @@
         <p:cNvPr id="1" name="">
           <a:extLst>
             <a:ext uri="{FF2B5EF4-FFF2-40B4-BE49-F238E27FC236}">
+              <a16:creationId xmlns:a16="http://schemas.microsoft.com/office/drawing/2014/main" id="{8729C40C-103C-D24C-1A72-910C9AB93E29}"/>
+            </a:ext>
+          </a:extLst>
+        </p:cNvPr>
+        <p:cNvGrpSpPr/>
+        <p:nvPr/>
+      </p:nvGrpSpPr>
+      <p:grpSpPr>
+        <a:xfrm>
+          <a:off x="0" y="0"/>
+          <a:ext cx="0" cy="0"/>
+          <a:chOff x="0" y="0"/>
+          <a:chExt cx="0" cy="0"/>
+        </a:xfrm>
+      </p:grpSpPr>
+      <p:sp>
+        <p:nvSpPr>
+          <p:cNvPr id="2" name="Title 1">
+            <a:extLst>
+              <a:ext uri="{FF2B5EF4-FFF2-40B4-BE49-F238E27FC236}">
+                <a16:creationId xmlns:a16="http://schemas.microsoft.com/office/drawing/2014/main" id="{19E03EE1-F804-8664-8C7A-959345FD1F92}"/>
+              </a:ext>
+            </a:extLst>
+          </p:cNvPr>
+          <p:cNvSpPr>
+            <a:spLocks noGrp="1"/>
+          </p:cNvSpPr>
+          <p:nvPr>
+            <p:ph type="title"/>
+          </p:nvPr>
+        </p:nvSpPr>
+        <p:spPr/>
+        <p:txBody>
+          <a:bodyPr/>
+          <a:lstStyle/>
+          <a:p>
+            <a:r>
+              <a:rPr lang="en-US" dirty="0"/>
+              <a:t>Inspect the Code | Browse</a:t>
+            </a:r>
+          </a:p>
+        </p:txBody>
+      </p:sp>
+      <p:sp>
+        <p:nvSpPr>
+          <p:cNvPr id="3" name="Content Placeholder 2">
+            <a:extLst>
+              <a:ext uri="{FF2B5EF4-FFF2-40B4-BE49-F238E27FC236}">
+                <a16:creationId xmlns:a16="http://schemas.microsoft.com/office/drawing/2014/main" id="{3AE19CF1-A310-0B20-5BA8-C03402D7373B}"/>
+              </a:ext>
+            </a:extLst>
+          </p:cNvPr>
+          <p:cNvSpPr>
+            <a:spLocks noGrp="1"/>
+          </p:cNvSpPr>
+          <p:nvPr>
+            <p:ph idx="1"/>
+          </p:nvPr>
+        </p:nvSpPr>
+        <p:spPr/>
+        <p:txBody>
+          <a:bodyPr>
+            <a:normAutofit fontScale="92500" lnSpcReduction="20000"/>
+          </a:bodyPr>
+          <a:lstStyle/>
+          <a:p>
+            <a:pPr marL="36900" indent="0">
+              <a:buNone/>
+            </a:pPr>
+            <a:r>
+              <a:rPr lang="en-US" dirty="0">
+                <a:latin typeface="OCR A Extended" panose="02010509020102010303" pitchFamily="50" charset="0"/>
+              </a:rPr>
+              <a:t>&lt;root&gt;</a:t>
+            </a:r>
+          </a:p>
+          <a:p>
+            <a:pPr marL="36900" indent="0">
+              <a:buNone/>
+            </a:pPr>
+            <a:r>
+              <a:rPr lang="en-US" dirty="0">
+                <a:latin typeface="OCR A Extended" panose="02010509020102010303" pitchFamily="50" charset="0"/>
+              </a:rPr>
+              <a:t>	|-- </a:t>
+            </a:r>
+            <a:r>
+              <a:rPr lang="en-US" dirty="0">
+                <a:solidFill>
+                  <a:srgbClr val="FFC000"/>
+                </a:solidFill>
+                <a:latin typeface="OCR A Extended" panose="02010509020102010303" pitchFamily="50" charset="0"/>
+              </a:rPr>
+              <a:t>app</a:t>
+            </a:r>
+          </a:p>
+          <a:p>
+            <a:pPr marL="36900" indent="0">
+              <a:buNone/>
+            </a:pPr>
+            <a:r>
+              <a:rPr lang="en-US" dirty="0">
+                <a:latin typeface="OCR A Extended" panose="02010509020102010303" pitchFamily="50" charset="0"/>
+              </a:rPr>
+              <a:t>		|-- </a:t>
+            </a:r>
+            <a:r>
+              <a:rPr lang="en-US" dirty="0">
+                <a:solidFill>
+                  <a:srgbClr val="FFC000"/>
+                </a:solidFill>
+                <a:latin typeface="OCR A Extended" panose="02010509020102010303" pitchFamily="50" charset="0"/>
+              </a:rPr>
+              <a:t>crud</a:t>
+            </a:r>
+            <a:r>
+              <a:rPr lang="en-US" dirty="0">
+                <a:solidFill>
+                  <a:schemeClr val="tx1"/>
+                </a:solidFill>
+                <a:latin typeface="OCR A Extended" panose="02010509020102010303" pitchFamily="50" charset="0"/>
+              </a:rPr>
+              <a:t>  </a:t>
+            </a:r>
+            <a:r>
+              <a:rPr lang="en-US" sz="2100" dirty="0">
+                <a:solidFill>
+                  <a:srgbClr val="00B050"/>
+                </a:solidFill>
+                <a:latin typeface="OCR A Extended" panose="02010509020102010303" pitchFamily="50" charset="0"/>
+                <a:sym typeface="Wingdings" panose="05000000000000000000" pitchFamily="2" charset="2"/>
+              </a:rPr>
+              <a:t>&lt;-- sub-</a:t>
+            </a:r>
+            <a:r>
+              <a:rPr lang="en-US" sz="2100" dirty="0" err="1">
+                <a:solidFill>
+                  <a:srgbClr val="00B050"/>
+                </a:solidFill>
+                <a:latin typeface="OCR A Extended" panose="02010509020102010303" pitchFamily="50" charset="0"/>
+                <a:sym typeface="Wingdings" panose="05000000000000000000" pitchFamily="2" charset="2"/>
+              </a:rPr>
+              <a:t>dir</a:t>
+            </a:r>
+            <a:r>
+              <a:rPr lang="en-US" sz="2100" dirty="0">
+                <a:solidFill>
+                  <a:srgbClr val="00B050"/>
+                </a:solidFill>
+                <a:latin typeface="OCR A Extended" panose="02010509020102010303" pitchFamily="50" charset="0"/>
+                <a:sym typeface="Wingdings" panose="05000000000000000000" pitchFamily="2" charset="2"/>
+              </a:rPr>
+              <a:t> for</a:t>
+            </a:r>
+            <a:r>
+              <a:rPr lang="en-US" sz="2100" dirty="0">
+                <a:solidFill>
+                  <a:srgbClr val="00B050"/>
+                </a:solidFill>
+                <a:latin typeface="OCR A Extended" panose="02010509020102010303" pitchFamily="50" charset="0"/>
+              </a:rPr>
+              <a:t> CRUD services</a:t>
+            </a:r>
+          </a:p>
+          <a:p>
+            <a:pPr marL="36900" indent="0">
+              <a:buNone/>
+            </a:pPr>
+            <a:r>
+              <a:rPr lang="en-US" dirty="0">
+                <a:latin typeface="OCR A Extended" panose="02010509020102010303" pitchFamily="50" charset="0"/>
+              </a:rPr>
+              <a:t>		|-- </a:t>
+            </a:r>
+            <a:r>
+              <a:rPr lang="en-US" dirty="0">
+                <a:solidFill>
+                  <a:srgbClr val="FFC000"/>
+                </a:solidFill>
+                <a:latin typeface="OCR A Extended" panose="02010509020102010303" pitchFamily="50" charset="0"/>
+              </a:rPr>
+              <a:t>exceptions</a:t>
+            </a:r>
+            <a:r>
+              <a:rPr lang="en-US" dirty="0">
+                <a:solidFill>
+                  <a:schemeClr val="tx1"/>
+                </a:solidFill>
+                <a:latin typeface="OCR A Extended" panose="02010509020102010303" pitchFamily="50" charset="0"/>
+              </a:rPr>
+              <a:t> </a:t>
+            </a:r>
+            <a:r>
+              <a:rPr lang="en-US" sz="2100" dirty="0">
+                <a:solidFill>
+                  <a:srgbClr val="00B050"/>
+                </a:solidFill>
+                <a:latin typeface="OCR A Extended" panose="02010509020102010303" pitchFamily="50" charset="0"/>
+                <a:sym typeface="Wingdings" panose="05000000000000000000" pitchFamily="2" charset="2"/>
+              </a:rPr>
+              <a:t>&lt;-- sub-</a:t>
+            </a:r>
+            <a:r>
+              <a:rPr lang="en-US" sz="2100" dirty="0" err="1">
+                <a:solidFill>
+                  <a:srgbClr val="00B050"/>
+                </a:solidFill>
+                <a:latin typeface="OCR A Extended" panose="02010509020102010303" pitchFamily="50" charset="0"/>
+                <a:sym typeface="Wingdings" panose="05000000000000000000" pitchFamily="2" charset="2"/>
+              </a:rPr>
+              <a:t>dir</a:t>
+            </a:r>
+            <a:r>
+              <a:rPr lang="en-US" sz="2100" dirty="0">
+                <a:solidFill>
+                  <a:srgbClr val="00B050"/>
+                </a:solidFill>
+                <a:latin typeface="OCR A Extended" panose="02010509020102010303" pitchFamily="50" charset="0"/>
+                <a:sym typeface="Wingdings" panose="05000000000000000000" pitchFamily="2" charset="2"/>
+              </a:rPr>
+              <a:t> for</a:t>
+            </a:r>
+            <a:r>
+              <a:rPr lang="en-US" sz="2100" dirty="0">
+                <a:solidFill>
+                  <a:srgbClr val="00B050"/>
+                </a:solidFill>
+                <a:latin typeface="OCR A Extended" panose="02010509020102010303" pitchFamily="50" charset="0"/>
+              </a:rPr>
+              <a:t> Custom Exceptions</a:t>
+            </a:r>
+          </a:p>
+          <a:p>
+            <a:pPr marL="36900" indent="0">
+              <a:buNone/>
+            </a:pPr>
+            <a:r>
+              <a:rPr lang="en-US" dirty="0">
+                <a:latin typeface="OCR A Extended" panose="02010509020102010303" pitchFamily="50" charset="0"/>
+              </a:rPr>
+              <a:t>		|-- </a:t>
+            </a:r>
+            <a:r>
+              <a:rPr lang="en-US" dirty="0">
+                <a:solidFill>
+                  <a:srgbClr val="FFC000"/>
+                </a:solidFill>
+                <a:latin typeface="OCR A Extended" panose="02010509020102010303" pitchFamily="50" charset="0"/>
+              </a:rPr>
+              <a:t>models</a:t>
+            </a:r>
+            <a:r>
+              <a:rPr lang="en-US" dirty="0">
+                <a:solidFill>
+                  <a:schemeClr val="tx1"/>
+                </a:solidFill>
+                <a:latin typeface="OCR A Extended" panose="02010509020102010303" pitchFamily="50" charset="0"/>
+              </a:rPr>
+              <a:t> </a:t>
+            </a:r>
+            <a:r>
+              <a:rPr lang="en-US" sz="2100" dirty="0">
+                <a:solidFill>
+                  <a:srgbClr val="00B050"/>
+                </a:solidFill>
+                <a:latin typeface="OCR A Extended" panose="02010509020102010303" pitchFamily="50" charset="0"/>
+                <a:sym typeface="Wingdings" panose="05000000000000000000" pitchFamily="2" charset="2"/>
+              </a:rPr>
+              <a:t>&lt;-- sub-</a:t>
+            </a:r>
+            <a:r>
+              <a:rPr lang="en-US" sz="2100" dirty="0" err="1">
+                <a:solidFill>
+                  <a:srgbClr val="00B050"/>
+                </a:solidFill>
+                <a:latin typeface="OCR A Extended" panose="02010509020102010303" pitchFamily="50" charset="0"/>
+                <a:sym typeface="Wingdings" panose="05000000000000000000" pitchFamily="2" charset="2"/>
+              </a:rPr>
+              <a:t>dir</a:t>
+            </a:r>
+            <a:r>
+              <a:rPr lang="en-US" sz="2100" dirty="0">
+                <a:solidFill>
+                  <a:srgbClr val="00B050"/>
+                </a:solidFill>
+                <a:latin typeface="OCR A Extended" panose="02010509020102010303" pitchFamily="50" charset="0"/>
+                <a:sym typeface="Wingdings" panose="05000000000000000000" pitchFamily="2" charset="2"/>
+              </a:rPr>
+              <a:t> for</a:t>
+            </a:r>
+            <a:r>
+              <a:rPr lang="en-US" sz="2100" dirty="0">
+                <a:solidFill>
+                  <a:srgbClr val="00B050"/>
+                </a:solidFill>
+                <a:latin typeface="OCR A Extended" panose="02010509020102010303" pitchFamily="50" charset="0"/>
+              </a:rPr>
+              <a:t> data Models</a:t>
+            </a:r>
+          </a:p>
+          <a:p>
+            <a:pPr marL="36900" indent="0">
+              <a:buNone/>
+            </a:pPr>
+            <a:r>
+              <a:rPr lang="en-US" dirty="0">
+                <a:latin typeface="OCR A Extended" panose="02010509020102010303" pitchFamily="50" charset="0"/>
+              </a:rPr>
+              <a:t>		|-- </a:t>
+            </a:r>
+            <a:r>
+              <a:rPr lang="en-US" dirty="0">
+                <a:solidFill>
+                  <a:srgbClr val="FFC000"/>
+                </a:solidFill>
+                <a:latin typeface="OCR A Extended" panose="02010509020102010303" pitchFamily="50" charset="0"/>
+              </a:rPr>
+              <a:t>routers</a:t>
+            </a:r>
+            <a:r>
+              <a:rPr lang="en-US" dirty="0">
+                <a:solidFill>
+                  <a:schemeClr val="tx1"/>
+                </a:solidFill>
+                <a:latin typeface="OCR A Extended" panose="02010509020102010303" pitchFamily="50" charset="0"/>
+              </a:rPr>
+              <a:t> </a:t>
+            </a:r>
+            <a:r>
+              <a:rPr lang="en-US" sz="2100" dirty="0">
+                <a:solidFill>
+                  <a:srgbClr val="00B050"/>
+                </a:solidFill>
+                <a:latin typeface="OCR A Extended" panose="02010509020102010303" pitchFamily="50" charset="0"/>
+                <a:sym typeface="Wingdings" panose="05000000000000000000" pitchFamily="2" charset="2"/>
+              </a:rPr>
+              <a:t>&lt;-- sub-</a:t>
+            </a:r>
+            <a:r>
+              <a:rPr lang="en-US" sz="2100" dirty="0" err="1">
+                <a:solidFill>
+                  <a:srgbClr val="00B050"/>
+                </a:solidFill>
+                <a:latin typeface="OCR A Extended" panose="02010509020102010303" pitchFamily="50" charset="0"/>
+                <a:sym typeface="Wingdings" panose="05000000000000000000" pitchFamily="2" charset="2"/>
+              </a:rPr>
+              <a:t>dir</a:t>
+            </a:r>
+            <a:r>
+              <a:rPr lang="en-US" sz="2100" dirty="0">
+                <a:solidFill>
+                  <a:srgbClr val="00B050"/>
+                </a:solidFill>
+                <a:latin typeface="OCR A Extended" panose="02010509020102010303" pitchFamily="50" charset="0"/>
+                <a:sym typeface="Wingdings" panose="05000000000000000000" pitchFamily="2" charset="2"/>
+              </a:rPr>
+              <a:t> for</a:t>
+            </a:r>
+            <a:r>
+              <a:rPr lang="en-US" sz="2100" dirty="0">
+                <a:solidFill>
+                  <a:srgbClr val="00B050"/>
+                </a:solidFill>
+                <a:latin typeface="OCR A Extended" panose="02010509020102010303" pitchFamily="50" charset="0"/>
+              </a:rPr>
+              <a:t> API route definitions</a:t>
+            </a:r>
+          </a:p>
+          <a:p>
+            <a:pPr marL="36900" indent="0">
+              <a:buNone/>
+            </a:pPr>
+            <a:r>
+              <a:rPr lang="en-US" dirty="0">
+                <a:latin typeface="OCR A Extended" panose="02010509020102010303" pitchFamily="50" charset="0"/>
+              </a:rPr>
+              <a:t>		|-- </a:t>
+            </a:r>
+            <a:r>
+              <a:rPr lang="en-US" dirty="0">
+                <a:solidFill>
+                  <a:srgbClr val="FFC000"/>
+                </a:solidFill>
+                <a:latin typeface="OCR A Extended" panose="02010509020102010303" pitchFamily="50" charset="0"/>
+              </a:rPr>
+              <a:t>schemas</a:t>
+            </a:r>
+            <a:r>
+              <a:rPr lang="en-US" dirty="0">
+                <a:solidFill>
+                  <a:schemeClr val="tx1"/>
+                </a:solidFill>
+                <a:latin typeface="OCR A Extended" panose="02010509020102010303" pitchFamily="50" charset="0"/>
+              </a:rPr>
+              <a:t> </a:t>
+            </a:r>
+            <a:r>
+              <a:rPr lang="en-US" sz="2100" dirty="0">
+                <a:solidFill>
+                  <a:srgbClr val="00B050"/>
+                </a:solidFill>
+                <a:latin typeface="OCR A Extended" panose="02010509020102010303" pitchFamily="50" charset="0"/>
+                <a:sym typeface="Wingdings" panose="05000000000000000000" pitchFamily="2" charset="2"/>
+              </a:rPr>
+              <a:t>&lt;-- sub-</a:t>
+            </a:r>
+            <a:r>
+              <a:rPr lang="en-US" sz="2100" dirty="0" err="1">
+                <a:solidFill>
+                  <a:srgbClr val="00B050"/>
+                </a:solidFill>
+                <a:latin typeface="OCR A Extended" panose="02010509020102010303" pitchFamily="50" charset="0"/>
+                <a:sym typeface="Wingdings" panose="05000000000000000000" pitchFamily="2" charset="2"/>
+              </a:rPr>
+              <a:t>dir</a:t>
+            </a:r>
+            <a:r>
+              <a:rPr lang="en-US" sz="2100" dirty="0">
+                <a:solidFill>
+                  <a:srgbClr val="00B050"/>
+                </a:solidFill>
+                <a:latin typeface="OCR A Extended" panose="02010509020102010303" pitchFamily="50" charset="0"/>
+                <a:sym typeface="Wingdings" panose="05000000000000000000" pitchFamily="2" charset="2"/>
+              </a:rPr>
+              <a:t> for</a:t>
+            </a:r>
+            <a:r>
+              <a:rPr lang="en-US" sz="2100" dirty="0">
+                <a:solidFill>
+                  <a:srgbClr val="00B050"/>
+                </a:solidFill>
+                <a:latin typeface="OCR A Extended" panose="02010509020102010303" pitchFamily="50" charset="0"/>
+              </a:rPr>
+              <a:t> API request/response models</a:t>
+            </a:r>
+          </a:p>
+          <a:p>
+            <a:pPr marL="36900" indent="0">
+              <a:buNone/>
+            </a:pPr>
+            <a:r>
+              <a:rPr lang="en-US" sz="2100" dirty="0">
+                <a:solidFill>
+                  <a:srgbClr val="00B050"/>
+                </a:solidFill>
+                <a:latin typeface="OCR A Extended" panose="02010509020102010303" pitchFamily="50" charset="0"/>
+              </a:rPr>
+              <a:t>	</a:t>
+            </a:r>
+            <a:r>
+              <a:rPr lang="en-US" dirty="0">
+                <a:latin typeface="OCR A Extended" panose="02010509020102010303" pitchFamily="50" charset="0"/>
+              </a:rPr>
+              <a:t>	|-- database.py</a:t>
+            </a:r>
+          </a:p>
+          <a:p>
+            <a:pPr marL="36900" indent="0">
+              <a:buNone/>
+            </a:pPr>
+            <a:r>
+              <a:rPr lang="en-US" dirty="0">
+                <a:latin typeface="OCR A Extended" panose="02010509020102010303" pitchFamily="50" charset="0"/>
+              </a:rPr>
+              <a:t>		|-- main.py</a:t>
+            </a:r>
+          </a:p>
+          <a:p>
+            <a:pPr marL="36900" indent="0">
+              <a:buNone/>
+            </a:pPr>
+            <a:r>
+              <a:rPr lang="en-US" dirty="0">
+                <a:latin typeface="OCR A Extended" panose="02010509020102010303" pitchFamily="50" charset="0"/>
+              </a:rPr>
+              <a:t>	|-- </a:t>
+            </a:r>
+            <a:r>
+              <a:rPr lang="en-US" dirty="0" err="1">
+                <a:solidFill>
+                  <a:schemeClr val="accent3"/>
+                </a:solidFill>
+                <a:latin typeface="OCR A Extended" panose="02010509020102010303" pitchFamily="50" charset="0"/>
+              </a:rPr>
+              <a:t>library.db</a:t>
+            </a:r>
+            <a:r>
+              <a:rPr lang="en-US" dirty="0">
+                <a:solidFill>
+                  <a:schemeClr val="accent3"/>
+                </a:solidFill>
+                <a:latin typeface="OCR A Extended" panose="02010509020102010303" pitchFamily="50" charset="0"/>
+              </a:rPr>
+              <a:t>  </a:t>
+            </a:r>
+            <a:r>
+              <a:rPr lang="en-US" dirty="0">
+                <a:solidFill>
+                  <a:srgbClr val="00B050"/>
+                </a:solidFill>
+                <a:latin typeface="OCR A Extended" panose="02010509020102010303" pitchFamily="50" charset="0"/>
+              </a:rPr>
+              <a:t>&lt;-- autogenerated at initial run</a:t>
+            </a:r>
+          </a:p>
+          <a:p>
+            <a:pPr marL="36900" indent="0">
+              <a:buNone/>
+            </a:pPr>
+            <a:r>
+              <a:rPr lang="en-US" dirty="0">
+                <a:latin typeface="OCR A Extended" panose="02010509020102010303" pitchFamily="50" charset="0"/>
+              </a:rPr>
+              <a:t>	|-- requirements.txt</a:t>
+            </a:r>
+            <a:endParaRPr lang="en-US" dirty="0">
+              <a:solidFill>
+                <a:srgbClr val="00B050"/>
+              </a:solidFill>
+              <a:latin typeface="OCR A Extended" panose="02010509020102010303" pitchFamily="50" charset="0"/>
+            </a:endParaRPr>
+          </a:p>
+          <a:p>
+            <a:pPr marL="36900" indent="0">
+              <a:buNone/>
+            </a:pPr>
+            <a:endParaRPr lang="en-US" dirty="0">
+              <a:solidFill>
+                <a:srgbClr val="00B050"/>
+              </a:solidFill>
+              <a:latin typeface="OCR A Extended" panose="02010509020102010303" pitchFamily="50" charset="0"/>
+            </a:endParaRPr>
+          </a:p>
+        </p:txBody>
+      </p:sp>
+    </p:spTree>
+    <p:extLst>
+      <p:ext uri="{BB962C8B-B14F-4D97-AF65-F5344CB8AC3E}">
+        <p14:creationId xmlns:p14="http://schemas.microsoft.com/office/powerpoint/2010/main" val="3418451939"/>
+      </p:ext>
+    </p:extLst>
+  </p:cSld>
+  <p:clrMapOvr>
+    <a:masterClrMapping/>
+  </p:clrMapOvr>
+</p:sld>
+</file>
+
+<file path=ppt/slides/slide7.xml><?xml version="1.0" encoding="utf-8"?>
+<p:sld xmlns:a="http://schemas.openxmlformats.org/drawingml/2006/main" xmlns:r="http://schemas.openxmlformats.org/officeDocument/2006/relationships" xmlns:p="http://schemas.openxmlformats.org/presentationml/2006/main">
+  <p:cSld>
+    <p:spTree>
+      <p:nvGrpSpPr>
+        <p:cNvPr id="1" name="">
+          <a:extLst>
+            <a:ext uri="{FF2B5EF4-FFF2-40B4-BE49-F238E27FC236}">
               <a16:creationId xmlns:a16="http://schemas.microsoft.com/office/drawing/2014/main" id="{5F5853A8-9D5F-C354-A231-7CEE86FB86CD}"/>
             </a:ext>
           </a:extLst>
@@ -19749,7 +20876,7 @@
 </p:sld>
 </file>
 
-<file path=ppt/slides/slide7.xml><?xml version="1.0" encoding="utf-8"?>
+<file path=ppt/slides/slide8.xml><?xml version="1.0" encoding="utf-8"?>
 <p:sld xmlns:a="http://schemas.openxmlformats.org/drawingml/2006/main" xmlns:r="http://schemas.openxmlformats.org/officeDocument/2006/relationships" xmlns:p="http://schemas.openxmlformats.org/presentationml/2006/main">
   <p:cSld>
     <p:spTree>
@@ -19848,7 +20975,7 @@
 </p:sld>
 </file>
 
-<file path=ppt/slides/slide8.xml><?xml version="1.0" encoding="utf-8"?>
+<file path=ppt/slides/slide9.xml><?xml version="1.0" encoding="utf-8"?>
 <p:sld xmlns:a="http://schemas.openxmlformats.org/drawingml/2006/main" xmlns:r="http://schemas.openxmlformats.org/officeDocument/2006/relationships" xmlns:p="http://schemas.openxmlformats.org/presentationml/2006/main">
   <p:cSld>
     <p:spTree>
@@ -19938,105 +21065,6 @@
     <p:extLst>
       <p:ext uri="{BB962C8B-B14F-4D97-AF65-F5344CB8AC3E}">
         <p14:creationId xmlns:p14="http://schemas.microsoft.com/office/powerpoint/2010/main" val="2994493916"/>
-      </p:ext>
-    </p:extLst>
-  </p:cSld>
-  <p:clrMapOvr>
-    <a:masterClrMapping/>
-  </p:clrMapOvr>
-</p:sld>
-</file>
-
-<file path=ppt/slides/slide9.xml><?xml version="1.0" encoding="utf-8"?>
-<p:sld xmlns:a="http://schemas.openxmlformats.org/drawingml/2006/main" xmlns:r="http://schemas.openxmlformats.org/officeDocument/2006/relationships" xmlns:p="http://schemas.openxmlformats.org/presentationml/2006/main">
-  <p:cSld>
-    <p:spTree>
-      <p:nvGrpSpPr>
-        <p:cNvPr id="1" name="">
-          <a:extLst>
-            <a:ext uri="{FF2B5EF4-FFF2-40B4-BE49-F238E27FC236}">
-              <a16:creationId xmlns:a16="http://schemas.microsoft.com/office/drawing/2014/main" id="{06645939-446F-9CF4-DFEF-15AF23969E95}"/>
-            </a:ext>
-          </a:extLst>
-        </p:cNvPr>
-        <p:cNvGrpSpPr/>
-        <p:nvPr/>
-      </p:nvGrpSpPr>
-      <p:grpSpPr>
-        <a:xfrm>
-          <a:off x="0" y="0"/>
-          <a:ext cx="0" cy="0"/>
-          <a:chOff x="0" y="0"/>
-          <a:chExt cx="0" cy="0"/>
-        </a:xfrm>
-      </p:grpSpPr>
-      <p:sp>
-        <p:nvSpPr>
-          <p:cNvPr id="2" name="Title 1">
-            <a:extLst>
-              <a:ext uri="{FF2B5EF4-FFF2-40B4-BE49-F238E27FC236}">
-                <a16:creationId xmlns:a16="http://schemas.microsoft.com/office/drawing/2014/main" id="{B8D94F73-6837-09C0-1ADC-9600FD14237C}"/>
-              </a:ext>
-            </a:extLst>
-          </p:cNvPr>
-          <p:cNvSpPr>
-            <a:spLocks noGrp="1"/>
-          </p:cNvSpPr>
-          <p:nvPr>
-            <p:ph type="title"/>
-          </p:nvPr>
-        </p:nvSpPr>
-        <p:spPr>
-          <a:xfrm>
-            <a:off x="913794" y="80211"/>
-            <a:ext cx="10353762" cy="970450"/>
-          </a:xfrm>
-        </p:spPr>
-        <p:txBody>
-          <a:bodyPr/>
-          <a:lstStyle/>
-          <a:p>
-            <a:r>
-              <a:rPr lang="en-US" dirty="0"/>
-              <a:t>Inspect the Code | ERD v0.3</a:t>
-            </a:r>
-          </a:p>
-        </p:txBody>
-      </p:sp>
-      <p:pic>
-        <p:nvPicPr>
-          <p:cNvPr id="4" name="Picture 3">
-            <a:extLst>
-              <a:ext uri="{FF2B5EF4-FFF2-40B4-BE49-F238E27FC236}">
-                <a16:creationId xmlns:a16="http://schemas.microsoft.com/office/drawing/2014/main" id="{A479E506-2E2E-7E64-819B-5F6809006579}"/>
-              </a:ext>
-            </a:extLst>
-          </p:cNvPr>
-          <p:cNvPicPr>
-            <a:picLocks noChangeAspect="1"/>
-          </p:cNvPicPr>
-          <p:nvPr/>
-        </p:nvPicPr>
-        <p:blipFill>
-          <a:blip r:embed="rId2"/>
-          <a:stretch>
-            <a:fillRect/>
-          </a:stretch>
-        </p:blipFill>
-        <p:spPr>
-          <a:xfrm>
-            <a:off x="1395916" y="1050661"/>
-            <a:ext cx="9389517" cy="5633710"/>
-          </a:xfrm>
-          <a:prstGeom prst="rect">
-            <a:avLst/>
-          </a:prstGeom>
-        </p:spPr>
-      </p:pic>
-    </p:spTree>
-    <p:extLst>
-      <p:ext uri="{BB962C8B-B14F-4D97-AF65-F5344CB8AC3E}">
-        <p14:creationId xmlns:p14="http://schemas.microsoft.com/office/powerpoint/2010/main" val="1024211096"/>
       </p:ext>
     </p:extLst>
   </p:cSld>
